--- a/docs/presentation/v6/going-v6-class-presentation.pptx
+++ b/docs/presentation/v6/going-v6-class-presentation.pptx
@@ -475,1934 +475,1934 @@
 </file>
 
 <file path=ppt/notesSlides/notesSlide1.xml><?xml version="1.0" encoding="utf-8"?>
-<p:notes xmlns:a="http://schemas.openxmlformats.org/drawingml/2006/main" xmlns:r="http://schemas.openxmlformats.org/officeDocument/2006/relationships" xmlns:p="http://schemas.openxmlformats.org/presentationml/2006/main" xmlns:m="http://schemas.openxmlformats.org/officeDocument/2006/math" xmlns:a14="http://schemas.microsoft.com/office/drawing/2010/main" showMasterSp="1" showMasterPhAnim="1">
-  <p:cSld>
-    <p:spTree>
-      <p:nvGrpSpPr>
-        <p:cNvPr id="1" name=""/>
-        <p:cNvGrpSpPr/>
-        <p:nvPr/>
-      </p:nvGrpSpPr>
-      <p:grpSpPr>
-        <a:xfrm>
-          <a:off x="0" y="0"/>
-          <a:ext cx="0" cy="0"/>
-          <a:chOff x="0" y="0"/>
-          <a:chExt cx="0" cy="0"/>
-        </a:xfrm>
-      </p:grpSpPr>
-      <p:sp>
-        <p:nvSpPr>
-          <p:cNvPr id="71" name="Shape 71"/>
-          <p:cNvSpPr/>
-          <p:nvPr>
-            <p:ph type="sldImg"/>
-          </p:nvPr>
-        </p:nvSpPr>
-        <p:spPr>
-          <a:prstGeom prst="rect">
-            <a:avLst/>
-          </a:prstGeom>
-        </p:spPr>
-        <p:txBody>
-          <a:bodyPr/>
-          <a:lstStyle/>
-          <a:p>
-            <a:pPr/>
-          </a:p>
-        </p:txBody>
-      </p:sp>
-      <p:sp>
-        <p:nvSpPr>
-          <p:cNvPr id="72" name="Shape 72"/>
-          <p:cNvSpPr/>
-          <p:nvPr>
-            <p:ph type="body" sz="quarter" idx="1"/>
-          </p:nvPr>
-        </p:nvSpPr>
-        <p:spPr>
-          <a:prstGeom prst="rect">
-            <a:avLst/>
-          </a:prstGeom>
-        </p:spPr>
-        <p:txBody>
-          <a:bodyPr/>
-          <a:lstStyle/>
-          <a:p>
-            <a:pPr/>
-            <a:r>
-              <a:t>[목표 35초]</a:t>
-            </a:r>
-          </a:p>
-          <a:p>
-            <a:pPr/>
-          </a:p>
-          <a:p>
-            <a:pPr/>
-            <a:r>
-              <a:t>안녕하세요. 제가 만든 여행 서비스, 고잉을 소개하겠습니다.</a:t>
-            </a:r>
-          </a:p>
-          <a:p>
-            <a:pPr/>
-          </a:p>
-          <a:p>
-            <a:pPr/>
-            <a:r>
-              <a:t>저는 여행하는 것도 좋아하고 새로운 음식점을 찾아다니는 것도 좋아합니다. 그런데 여행을 갈 때마다 식당을 검색하고, 리뷰를 읽고, 숙소에서 얼마나 먼지 비교하는 과정이 꽤 번거로웠습니다. 예약을 해 놓고도 시간을 확인하려고 메일함을 다시 찾아야 했고요.</a:t>
-            </a:r>
-          </a:p>
-          <a:p>
-            <a:pPr/>
-          </a:p>
-          <a:p>
-            <a:pPr/>
-            <a:r>
-              <a:t>그래서 제가 여행을 준비할 때 직접 쓰고 싶은 서비스를 만들어 봤습니다. 오늘은 어떤 불편함에서 시작했고, 그걸 어떤 기능으로 해결하려 했는지 보여드리겠습니다.</a:t>
-            </a:r>
-          </a:p>
-          <a:p>
-            <a:pPr/>
-          </a:p>
-          <a:p>
-            <a:pPr/>
-            <a:r>
-              <a:t>화면 안내: 제목을 보여주며 개인적인 계기부터 말합니다.</a:t>
-            </a:r>
-          </a:p>
-          <a:p>
-            <a:pPr/>
-          </a:p>
-          <a:p>
-            <a:pPr/>
-            <a:r>
-              <a:t>[참고 자료 / 낭독하지 않음]</a:t>
-            </a:r>
-          </a:p>
-          <a:p>
-            <a:pPr/>
-            <a:r>
-              <a:t>구현: https://github.com/Jin-s-work/Travel-Agent</a:t>
-            </a:r>
-          </a:p>
-          <a:p>
-            <a:pPr/>
-            <a:r>
-              <a:t>메일·화면: docs/presentation/CREDITS.md (2026-10-07 합성 여행 화면)</a:t>
-            </a:r>
-          </a:p>
-          <a:p>
-            <a:pPr/>
-            <a:r>
-              <a:t>추천 모델: docs/service-v4/RECOMMENDATION_MODEL.md</a:t>
-            </a:r>
-          </a:p>
-          <a:p>
-            <a:pPr/>
-            <a:r>
-              <a:t>일정: docs/service-v2/ITINERARY_RUNBOOK.md</a:t>
-            </a:r>
-          </a:p>
-          <a:p>
-            <a:pPr/>
-            <a:r>
-              <a:t>배포 구성: docs/operations/RENDER_SUPABASE.md</a:t>
-            </a:r>
-          </a:p>
-          <a:p>
-            <a:pPr/>
-            <a:r>
-              <a:t>엄격 현지어 추천은 실제 이용 범위·언어 품질 검증 전 OFF. 100개 도시 입력은 자료 확보 수준을 뜻하지 않음.</a:t>
-            </a:r>
-          </a:p>
-          <a:p>
-            <a:pPr/>
-            <a:r>
-              <a:t>사진: Javier Lastras, Barra de Casa Lucio, CC BY 2.0 https://commons.wikimedia.org/wiki/File:Barra_de_Casa_Lucio_(4245090907).jpg</a:t>
-            </a:r>
-          </a:p>
-          <a:p>
-            <a:pPr/>
-            <a:r>
-              <a:t>사진: Tamorlan, Gallina en Pepitoria (Ciriaco), CC BY-SA 3.0 https://commons.wikimedia.org/wiki/File:Gallina_en_Pepitoria_(Ciriaco).JPG</a:t>
-            </a:r>
-          </a:p>
-          <a:p>
-            <a:pPr/>
-            <a:r>
-              <a:t>영상은 기존 실제 캡처의 편집본이며 실시간 조작이나 최신 모델 실행의 기록이 아님.</a:t>
-            </a:r>
-          </a:p>
-        </p:txBody>
-      </p:sp>
-    </p:spTree>
-  </p:cSld>
-  <p:clrMapOvr>
-    <a:masterClrMapping/>
-  </p:clrMapOvr>
-</p:notes>
+<ns0:notes xmlns:ns0="http://schemas.openxmlformats.org/presentationml/2006/main" xmlns:ns1="http://schemas.openxmlformats.org/drawingml/2006/main" showMasterSp="1" showMasterPhAnim="1">
+  <ns0:cSld>
+    <ns0:spTree>
+      <ns0:nvGrpSpPr>
+        <ns0:cNvPr id="1" name=""/>
+        <ns0:cNvGrpSpPr/>
+        <ns0:nvPr/>
+      </ns0:nvGrpSpPr>
+      <ns0:grpSpPr>
+        <ns1:xfrm>
+          <ns1:off x="0" y="0"/>
+          <ns1:ext cx="0" cy="0"/>
+          <ns1:chOff x="0" y="0"/>
+          <ns1:chExt cx="0" cy="0"/>
+        </ns1:xfrm>
+      </ns0:grpSpPr>
+      <ns0:sp>
+        <ns0:nvSpPr>
+          <ns0:cNvPr id="71" name="Shape 71"/>
+          <ns0:cNvSpPr/>
+          <ns0:nvPr>
+            <ns0:ph type="sldImg"/>
+          </ns0:nvPr>
+        </ns0:nvSpPr>
+        <ns0:spPr>
+          <ns1:prstGeom prst="rect">
+            <ns1:avLst/>
+          </ns1:prstGeom>
+        </ns0:spPr>
+        <ns0:txBody>
+          <ns1:bodyPr/>
+          <ns1:lstStyle/>
+          <ns1:p>
+            <ns1:pPr/>
+          </ns1:p>
+        </ns0:txBody>
+      </ns0:sp>
+      <ns0:sp>
+        <ns0:nvSpPr>
+          <ns0:cNvPr id="72" name="Shape 72"/>
+          <ns0:cNvSpPr/>
+          <ns0:nvPr>
+            <ns0:ph type="body" sz="quarter" idx="1"/>
+          </ns0:nvPr>
+        </ns0:nvSpPr>
+        <ns0:spPr>
+          <ns1:prstGeom prst="rect">
+            <ns1:avLst/>
+          </ns1:prstGeom>
+        </ns0:spPr>
+        <ns0:txBody>
+          <ns1:bodyPr/>
+          <ns1:lstStyle/>
+          <ns1:p>
+            <ns1:pPr/>
+            <ns1:r>
+              <ns1:t/>
+            </ns1:r>
+          </ns1:p>
+          <ns1:p>
+            <ns1:pPr/>
+          </ns1:p>
+          <ns1:p>
+            <ns1:pPr/>
+            <ns1:r>
+              <ns1:t/>
+            </ns1:r>
+          </ns1:p>
+          <ns1:p>
+            <ns1:pPr/>
+          </ns1:p>
+          <ns1:p>
+            <ns1:pPr/>
+            <ns1:r>
+              <ns1:t/>
+            </ns1:r>
+          </ns1:p>
+          <ns1:p>
+            <ns1:pPr/>
+          </ns1:p>
+          <ns1:p>
+            <ns1:pPr/>
+            <ns1:r>
+              <ns1:t/>
+            </ns1:r>
+          </ns1:p>
+          <ns1:p>
+            <ns1:pPr/>
+          </ns1:p>
+          <ns1:p>
+            <ns1:pPr/>
+            <ns1:r>
+              <ns1:t/>
+            </ns1:r>
+          </ns1:p>
+          <ns1:p>
+            <ns1:pPr/>
+          </ns1:p>
+          <ns1:p>
+            <ns1:pPr/>
+            <ns1:r>
+              <ns1:t/>
+            </ns1:r>
+          </ns1:p>
+          <ns1:p>
+            <ns1:pPr/>
+            <ns1:r>
+              <ns1:t/>
+            </ns1:r>
+          </ns1:p>
+          <ns1:p>
+            <ns1:pPr/>
+            <ns1:r>
+              <ns1:t/>
+            </ns1:r>
+          </ns1:p>
+          <ns1:p>
+            <ns1:pPr/>
+            <ns1:r>
+              <ns1:t/>
+            </ns1:r>
+          </ns1:p>
+          <ns1:p>
+            <ns1:pPr/>
+            <ns1:r>
+              <ns1:t/>
+            </ns1:r>
+          </ns1:p>
+          <ns1:p>
+            <ns1:pPr/>
+            <ns1:r>
+              <ns1:t/>
+            </ns1:r>
+          </ns1:p>
+          <ns1:p>
+            <ns1:pPr/>
+            <ns1:r>
+              <ns1:t/>
+            </ns1:r>
+          </ns1:p>
+          <ns1:p>
+            <ns1:pPr/>
+            <ns1:r>
+              <ns1:t/>
+            </ns1:r>
+          </ns1:p>
+          <ns1:p>
+            <ns1:pPr/>
+            <ns1:r>
+              <ns1:t/>
+            </ns1:r>
+          </ns1:p>
+          <ns1:p>
+            <ns1:pPr/>
+            <ns1:r>
+              <ns1:t/>
+            </ns1:r>
+          </ns1:p>
+        </ns0:txBody>
+      </ns0:sp>
+    </ns0:spTree>
+  </ns0:cSld>
+  <ns0:clrMapOvr>
+    <ns1:masterClrMapping/>
+  </ns0:clrMapOvr>
+</ns0:notes>
 </file>
 
 <file path=ppt/notesSlides/notesSlide10.xml><?xml version="1.0" encoding="utf-8"?>
-<p:notes xmlns:a="http://schemas.openxmlformats.org/drawingml/2006/main" xmlns:r="http://schemas.openxmlformats.org/officeDocument/2006/relationships" xmlns:p="http://schemas.openxmlformats.org/presentationml/2006/main" xmlns:m="http://schemas.openxmlformats.org/officeDocument/2006/math" xmlns:a14="http://schemas.microsoft.com/office/drawing/2010/main" showMasterSp="1" showMasterPhAnim="1">
-  <p:cSld>
-    <p:spTree>
-      <p:nvGrpSpPr>
-        <p:cNvPr id="1" name=""/>
-        <p:cNvGrpSpPr/>
-        <p:nvPr/>
-      </p:nvGrpSpPr>
-      <p:grpSpPr>
-        <a:xfrm>
-          <a:off x="0" y="0"/>
-          <a:ext cx="0" cy="0"/>
-          <a:chOff x="0" y="0"/>
-          <a:chExt cx="0" cy="0"/>
-        </a:xfrm>
-      </p:grpSpPr>
-      <p:sp>
-        <p:nvSpPr>
-          <p:cNvPr id="186" name="Shape 186"/>
-          <p:cNvSpPr/>
-          <p:nvPr>
-            <p:ph type="sldImg"/>
-          </p:nvPr>
-        </p:nvSpPr>
-        <p:spPr>
-          <a:prstGeom prst="rect">
-            <a:avLst/>
-          </a:prstGeom>
-        </p:spPr>
-        <p:txBody>
-          <a:bodyPr/>
-          <a:lstStyle/>
-          <a:p>
-            <a:pPr/>
-          </a:p>
-        </p:txBody>
-      </p:sp>
-      <p:sp>
-        <p:nvSpPr>
-          <p:cNvPr id="187" name="Shape 187"/>
-          <p:cNvSpPr/>
-          <p:nvPr>
-            <p:ph type="body" sz="quarter" idx="1"/>
-          </p:nvPr>
-        </p:nvSpPr>
-        <p:spPr>
-          <a:prstGeom prst="rect">
-            <a:avLst/>
-          </a:prstGeom>
-        </p:spPr>
-        <p:txBody>
-          <a:bodyPr/>
-          <a:lstStyle/>
-          <a:p>
-            <a:pPr/>
-            <a:r>
-              <a:t>[목표 40초]</a:t>
-            </a:r>
-          </a:p>
-          <a:p>
-            <a:pPr/>
-          </a:p>
-          <a:p>
-            <a:pPr/>
-            <a:r>
-              <a:t>지금은 예약을 정리하고, 질문하고, 장소를 고른 뒤 일정으로 연결하는 흐름을 만들었습니다. 예약 준비 목록이나 오늘 보기, 통화별 예상 지출처럼 그다음에 필요한 기능도 추가했습니다.</a:t>
-            </a:r>
-          </a:p>
-          <a:p>
-            <a:pPr/>
-          </a:p>
-          <a:p>
-            <a:pPr/>
-            <a:r>
-              <a:t>앞으로는 실제 리뷰 자료를 검증해서 현지어 탐색을 제대로 활용할 수 있게 하고 싶습니다. 추천 순위를 모르는 사람에게 후보를 평가받고, 실제 여행에서 골랐던 이유나 방문 후 느낌도 받아 보려고 합니다.</a:t>
-            </a:r>
-          </a:p>
-          <a:p>
-            <a:pPr/>
-          </a:p>
-          <a:p>
-            <a:pPr/>
-            <a:r>
-              <a:t>도시 입력은 백 개 도시를 지원하지만 모든 도시의 자료가 똑같이 충분한 것은 아닙니다. 도시별 정보와 경로를 보강하면서 휴대폰에서도 직접 써 볼 계획입니다. 마지막으로 실제 화면에서 이 흐름이 어떻게 보이는지 짧은 영상으로 보여드리겠습니다.</a:t>
-            </a:r>
-          </a:p>
-          <a:p>
-            <a:pPr/>
-          </a:p>
-          <a:p>
-            <a:pPr/>
-            <a:r>
-              <a:t>화면 안내: 현재 사용할 흐름과 다음 검증 과제를 구분해 설명합니다.</a:t>
-            </a:r>
-          </a:p>
-          <a:p>
-            <a:pPr/>
-          </a:p>
-          <a:p>
-            <a:pPr/>
-            <a:r>
-              <a:t>[참고 자료 / 낭독하지 않음]</a:t>
-            </a:r>
-          </a:p>
-          <a:p>
-            <a:pPr/>
-            <a:r>
-              <a:t>구현: https://github.com/Jin-s-work/Travel-Agent</a:t>
-            </a:r>
-          </a:p>
-          <a:p>
-            <a:pPr/>
-            <a:r>
-              <a:t>메일·화면: docs/presentation/CREDITS.md (2026-10-07 합성 여행 화면)</a:t>
-            </a:r>
-          </a:p>
-          <a:p>
-            <a:pPr/>
-            <a:r>
-              <a:t>추천 모델: docs/service-v4/RECOMMENDATION_MODEL.md</a:t>
-            </a:r>
-          </a:p>
-          <a:p>
-            <a:pPr/>
-            <a:r>
-              <a:t>일정: docs/service-v2/ITINERARY_RUNBOOK.md</a:t>
-            </a:r>
-          </a:p>
-          <a:p>
-            <a:pPr/>
-            <a:r>
-              <a:t>배포 구성: docs/operations/RENDER_SUPABASE.md</a:t>
-            </a:r>
-          </a:p>
-          <a:p>
-            <a:pPr/>
-            <a:r>
-              <a:t>엄격 현지어 추천은 실제 이용 범위·언어 품질 검증 전 OFF. 100개 도시 입력은 자료 확보 수준을 뜻하지 않음.</a:t>
-            </a:r>
-          </a:p>
-          <a:p>
-            <a:pPr/>
-            <a:r>
-              <a:t>사진: Javier Lastras, Barra de Casa Lucio, CC BY 2.0 https://commons.wikimedia.org/wiki/File:Barra_de_Casa_Lucio_(4245090907).jpg</a:t>
-            </a:r>
-          </a:p>
-          <a:p>
-            <a:pPr/>
-            <a:r>
-              <a:t>사진: Tamorlan, Gallina en Pepitoria (Ciriaco), CC BY-SA 3.0 https://commons.wikimedia.org/wiki/File:Gallina_en_Pepitoria_(Ciriaco).JPG</a:t>
-            </a:r>
-          </a:p>
-          <a:p>
-            <a:pPr/>
-            <a:r>
-              <a:t>영상은 기존 실제 캡처의 편집본이며 실시간 조작이나 최신 모델 실행의 기록이 아님.</a:t>
-            </a:r>
-          </a:p>
-        </p:txBody>
-      </p:sp>
-    </p:spTree>
-  </p:cSld>
-  <p:clrMapOvr>
-    <a:masterClrMapping/>
-  </p:clrMapOvr>
-</p:notes>
+<ns0:notes xmlns:ns0="http://schemas.openxmlformats.org/presentationml/2006/main" xmlns:ns1="http://schemas.openxmlformats.org/drawingml/2006/main" showMasterSp="1" showMasterPhAnim="1">
+  <ns0:cSld>
+    <ns0:spTree>
+      <ns0:nvGrpSpPr>
+        <ns0:cNvPr id="1" name=""/>
+        <ns0:cNvGrpSpPr/>
+        <ns0:nvPr/>
+      </ns0:nvGrpSpPr>
+      <ns0:grpSpPr>
+        <ns1:xfrm>
+          <ns1:off x="0" y="0"/>
+          <ns1:ext cx="0" cy="0"/>
+          <ns1:chOff x="0" y="0"/>
+          <ns1:chExt cx="0" cy="0"/>
+        </ns1:xfrm>
+      </ns0:grpSpPr>
+      <ns0:sp>
+        <ns0:nvSpPr>
+          <ns0:cNvPr id="186" name="Shape 186"/>
+          <ns0:cNvSpPr/>
+          <ns0:nvPr>
+            <ns0:ph type="sldImg"/>
+          </ns0:nvPr>
+        </ns0:nvSpPr>
+        <ns0:spPr>
+          <ns1:prstGeom prst="rect">
+            <ns1:avLst/>
+          </ns1:prstGeom>
+        </ns0:spPr>
+        <ns0:txBody>
+          <ns1:bodyPr/>
+          <ns1:lstStyle/>
+          <ns1:p>
+            <ns1:pPr/>
+          </ns1:p>
+        </ns0:txBody>
+      </ns0:sp>
+      <ns0:sp>
+        <ns0:nvSpPr>
+          <ns0:cNvPr id="187" name="Shape 187"/>
+          <ns0:cNvSpPr/>
+          <ns0:nvPr>
+            <ns0:ph type="body" sz="quarter" idx="1"/>
+          </ns0:nvPr>
+        </ns0:nvSpPr>
+        <ns0:spPr>
+          <ns1:prstGeom prst="rect">
+            <ns1:avLst/>
+          </ns1:prstGeom>
+        </ns0:spPr>
+        <ns0:txBody>
+          <ns1:bodyPr/>
+          <ns1:lstStyle/>
+          <ns1:p>
+            <ns1:pPr/>
+            <ns1:r>
+              <ns1:t/>
+            </ns1:r>
+          </ns1:p>
+          <ns1:p>
+            <ns1:pPr/>
+          </ns1:p>
+          <ns1:p>
+            <ns1:pPr/>
+            <ns1:r>
+              <ns1:t/>
+            </ns1:r>
+          </ns1:p>
+          <ns1:p>
+            <ns1:pPr/>
+          </ns1:p>
+          <ns1:p>
+            <ns1:pPr/>
+            <ns1:r>
+              <ns1:t/>
+            </ns1:r>
+          </ns1:p>
+          <ns1:p>
+            <ns1:pPr/>
+          </ns1:p>
+          <ns1:p>
+            <ns1:pPr/>
+            <ns1:r>
+              <ns1:t/>
+            </ns1:r>
+          </ns1:p>
+          <ns1:p>
+            <ns1:pPr/>
+          </ns1:p>
+          <ns1:p>
+            <ns1:pPr/>
+            <ns1:r>
+              <ns1:t/>
+            </ns1:r>
+          </ns1:p>
+          <ns1:p>
+            <ns1:pPr/>
+          </ns1:p>
+          <ns1:p>
+            <ns1:pPr/>
+            <ns1:r>
+              <ns1:t/>
+            </ns1:r>
+          </ns1:p>
+          <ns1:p>
+            <ns1:pPr/>
+            <ns1:r>
+              <ns1:t/>
+            </ns1:r>
+          </ns1:p>
+          <ns1:p>
+            <ns1:pPr/>
+            <ns1:r>
+              <ns1:t/>
+            </ns1:r>
+          </ns1:p>
+          <ns1:p>
+            <ns1:pPr/>
+            <ns1:r>
+              <ns1:t/>
+            </ns1:r>
+          </ns1:p>
+          <ns1:p>
+            <ns1:pPr/>
+            <ns1:r>
+              <ns1:t/>
+            </ns1:r>
+          </ns1:p>
+          <ns1:p>
+            <ns1:pPr/>
+            <ns1:r>
+              <ns1:t/>
+            </ns1:r>
+          </ns1:p>
+          <ns1:p>
+            <ns1:pPr/>
+            <ns1:r>
+              <ns1:t/>
+            </ns1:r>
+          </ns1:p>
+          <ns1:p>
+            <ns1:pPr/>
+            <ns1:r>
+              <ns1:t/>
+            </ns1:r>
+          </ns1:p>
+          <ns1:p>
+            <ns1:pPr/>
+            <ns1:r>
+              <ns1:t/>
+            </ns1:r>
+          </ns1:p>
+          <ns1:p>
+            <ns1:pPr/>
+            <ns1:r>
+              <ns1:t/>
+            </ns1:r>
+          </ns1:p>
+        </ns0:txBody>
+      </ns0:sp>
+    </ns0:spTree>
+  </ns0:cSld>
+  <ns0:clrMapOvr>
+    <ns1:masterClrMapping/>
+  </ns0:clrMapOvr>
+</ns0:notes>
 </file>
 
 <file path=ppt/notesSlides/notesSlide11.xml><?xml version="1.0" encoding="utf-8"?>
-<p:notes xmlns:a="http://schemas.openxmlformats.org/drawingml/2006/main" xmlns:r="http://schemas.openxmlformats.org/officeDocument/2006/relationships" xmlns:p="http://schemas.openxmlformats.org/presentationml/2006/main" xmlns:m="http://schemas.openxmlformats.org/officeDocument/2006/math" xmlns:a14="http://schemas.microsoft.com/office/drawing/2010/main" showMasterSp="1" showMasterPhAnim="1">
-  <p:cSld>
-    <p:spTree>
-      <p:nvGrpSpPr>
-        <p:cNvPr id="1" name=""/>
-        <p:cNvGrpSpPr/>
-        <p:nvPr/>
-      </p:nvGrpSpPr>
-      <p:grpSpPr>
-        <a:xfrm>
-          <a:off x="0" y="0"/>
-          <a:ext cx="0" cy="0"/>
-          <a:chOff x="0" y="0"/>
-          <a:chExt cx="0" cy="0"/>
-        </a:xfrm>
-      </p:grpSpPr>
-      <p:sp>
-        <p:nvSpPr>
-          <p:cNvPr id="192" name="Shape 192"/>
-          <p:cNvSpPr/>
-          <p:nvPr>
-            <p:ph type="sldImg"/>
-          </p:nvPr>
-        </p:nvSpPr>
-        <p:spPr>
-          <a:prstGeom prst="rect">
-            <a:avLst/>
-          </a:prstGeom>
-        </p:spPr>
-        <p:txBody>
-          <a:bodyPr/>
-          <a:lstStyle/>
-          <a:p>
-            <a:pPr/>
-          </a:p>
-        </p:txBody>
-      </p:sp>
-      <p:sp>
-        <p:nvSpPr>
-          <p:cNvPr id="193" name="Shape 193"/>
-          <p:cNvSpPr/>
-          <p:nvPr>
-            <p:ph type="body" sz="quarter" idx="1"/>
-          </p:nvPr>
-        </p:nvSpPr>
-        <p:spPr>
-          <a:prstGeom prst="rect">
-            <a:avLst/>
-          </a:prstGeom>
-        </p:spPr>
-        <p:txBody>
-          <a:bodyPr/>
-          <a:lstStyle/>
-          <a:p>
-            <a:pPr/>
-            <a:r>
-              <a:t>[목표 70초]</a:t>
-            </a:r>
-          </a:p>
-          <a:p>
-            <a:pPr/>
-          </a:p>
-          <a:p>
-            <a:pPr/>
-            <a:r>
-              <a:t>[영상 시작 전]</a:t>
-            </a:r>
-          </a:p>
-          <a:p>
-            <a:pPr/>
-            <a:r>
-              <a:t>기존에 가상 여행으로 촬영한 실제 화면을 편집한 영상입니다. 메일은 발표용 가상 자료이고, 장소 화면은 공개된 실제 식당 자료입니다.</a:t>
-            </a:r>
-          </a:p>
-          <a:p>
-            <a:pPr/>
-          </a:p>
-          <a:p>
-            <a:pPr/>
-            <a:r>
-              <a:t>[0~16초]</a:t>
-            </a:r>
-          </a:p>
-          <a:p>
-            <a:pPr/>
-            <a:r>
-              <a:t>처음에는 여행 기간과 예약을 한 화면에서 확인합니다. 예약 메뉴에서 메일을 올리고 처리한 결과를 볼 수 있습니다.</a:t>
-            </a:r>
-          </a:p>
-          <a:p>
-            <a:pPr/>
-          </a:p>
-          <a:p>
-            <a:pPr/>
-            <a:r>
-              <a:t>[16~34초]</a:t>
-            </a:r>
-          </a:p>
-          <a:p>
-            <a:pPr/>
-            <a:r>
-              <a:t>호텔 예약을 열면 날짜와 시간을 확인합니다. 날짜별로 질문하면 해당하는 예약을 모아서 보여줍니다.</a:t>
-            </a:r>
-          </a:p>
-          <a:p>
-            <a:pPr/>
-          </a:p>
-          <a:p>
-            <a:pPr/>
-            <a:r>
-              <a:t>[34~54초]</a:t>
-            </a:r>
-          </a:p>
-          <a:p>
-            <a:pPr/>
-            <a:r>
-              <a:t>답변에 쓰인 원문 근거를 확인하고, 장소 탐색에서는 사진과 방문 전에 확인할 조건을 같이 볼 수 있습니다.</a:t>
-            </a:r>
-          </a:p>
-          <a:p>
-            <a:pPr/>
-          </a:p>
-          <a:p>
-            <a:pPr/>
-            <a:r>
-              <a:t>[54~64초]</a:t>
-            </a:r>
-          </a:p>
-          <a:p>
-            <a:pPr/>
-            <a:r>
-              <a:t>일정에서는 이미 정한 예약을 유지하면서 이동이나 시간 충돌을 알려줍니다.</a:t>
-            </a:r>
-          </a:p>
-          <a:p>
-            <a:pPr/>
-          </a:p>
-          <a:p>
-            <a:pPr/>
-            <a:r>
-              <a:t>[영상 종료 후]</a:t>
-            </a:r>
-          </a:p>
-          <a:p>
-            <a:pPr/>
-            <a:r>
-              <a:t>여행을 갈 때 매번 찾느라 번거로웠던 일을 조금 줄여 보려고 시작한 서비스입니다. 앞으로도 직접 쓰면서 고쳐 나가려고 합니다. 감사합니다.</a:t>
-            </a:r>
-          </a:p>
-          <a:p>
-            <a:pPr/>
-          </a:p>
-          <a:p>
-            <a:pPr/>
-            <a:r>
-              <a:t>화면 안내: 영상 재생. 아래 시간별 멘트를 참고하고 화면을 읽을 시간을 남깁니다.</a:t>
-            </a:r>
-          </a:p>
-          <a:p>
-            <a:pPr/>
-          </a:p>
-          <a:p>
-            <a:pPr/>
-            <a:r>
-              <a:t>[참고 자료 / 낭독하지 않음]</a:t>
-            </a:r>
-          </a:p>
-          <a:p>
-            <a:pPr/>
-            <a:r>
-              <a:t>구현: https://github.com/Jin-s-work/Travel-Agent</a:t>
-            </a:r>
-          </a:p>
-          <a:p>
-            <a:pPr/>
-            <a:r>
-              <a:t>메일·화면: docs/presentation/CREDITS.md (2026-10-07 합성 여행 화면)</a:t>
-            </a:r>
-          </a:p>
-          <a:p>
-            <a:pPr/>
-            <a:r>
-              <a:t>추천 모델: docs/service-v4/RECOMMENDATION_MODEL.md</a:t>
-            </a:r>
-          </a:p>
-          <a:p>
-            <a:pPr/>
-            <a:r>
-              <a:t>일정: docs/service-v2/ITINERARY_RUNBOOK.md</a:t>
-            </a:r>
-          </a:p>
-          <a:p>
-            <a:pPr/>
-            <a:r>
-              <a:t>배포 구성: docs/operations/RENDER_SUPABASE.md</a:t>
-            </a:r>
-          </a:p>
-          <a:p>
-            <a:pPr/>
-            <a:r>
-              <a:t>엄격 현지어 추천은 실제 이용 범위·언어 품질 검증 전 OFF. 100개 도시 입력은 자료 확보 수준을 뜻하지 않음.</a:t>
-            </a:r>
-          </a:p>
-          <a:p>
-            <a:pPr/>
-            <a:r>
-              <a:t>사진: Javier Lastras, Barra de Casa Lucio, CC BY 2.0 https://commons.wikimedia.org/wiki/File:Barra_de_Casa_Lucio_(4245090907).jpg</a:t>
-            </a:r>
-          </a:p>
-          <a:p>
-            <a:pPr/>
-            <a:r>
-              <a:t>사진: Tamorlan, Gallina en Pepitoria (Ciriaco), CC BY-SA 3.0 https://commons.wikimedia.org/wiki/File:Gallina_en_Pepitoria_(Ciriaco).JPG</a:t>
-            </a:r>
-          </a:p>
-          <a:p>
-            <a:pPr/>
-            <a:r>
-              <a:t>영상은 기존 실제 캡처의 편집본이며 실시간 조작이나 최신 모델 실행의 기록이 아님.</a:t>
-            </a:r>
-          </a:p>
-        </p:txBody>
-      </p:sp>
-    </p:spTree>
-  </p:cSld>
-  <p:clrMapOvr>
-    <a:masterClrMapping/>
-  </p:clrMapOvr>
-</p:notes>
+<ns0:notes xmlns:ns0="http://schemas.openxmlformats.org/presentationml/2006/main" xmlns:ns1="http://schemas.openxmlformats.org/drawingml/2006/main" showMasterSp="1" showMasterPhAnim="1">
+  <ns0:cSld>
+    <ns0:spTree>
+      <ns0:nvGrpSpPr>
+        <ns0:cNvPr id="1" name=""/>
+        <ns0:cNvGrpSpPr/>
+        <ns0:nvPr/>
+      </ns0:nvGrpSpPr>
+      <ns0:grpSpPr>
+        <ns1:xfrm>
+          <ns1:off x="0" y="0"/>
+          <ns1:ext cx="0" cy="0"/>
+          <ns1:chOff x="0" y="0"/>
+          <ns1:chExt cx="0" cy="0"/>
+        </ns1:xfrm>
+      </ns0:grpSpPr>
+      <ns0:sp>
+        <ns0:nvSpPr>
+          <ns0:cNvPr id="192" name="Shape 192"/>
+          <ns0:cNvSpPr/>
+          <ns0:nvPr>
+            <ns0:ph type="sldImg"/>
+          </ns0:nvPr>
+        </ns0:nvSpPr>
+        <ns0:spPr>
+          <ns1:prstGeom prst="rect">
+            <ns1:avLst/>
+          </ns1:prstGeom>
+        </ns0:spPr>
+        <ns0:txBody>
+          <ns1:bodyPr/>
+          <ns1:lstStyle/>
+          <ns1:p>
+            <ns1:pPr/>
+          </ns1:p>
+        </ns0:txBody>
+      </ns0:sp>
+      <ns0:sp>
+        <ns0:nvSpPr>
+          <ns0:cNvPr id="193" name="Shape 193"/>
+          <ns0:cNvSpPr/>
+          <ns0:nvPr>
+            <ns0:ph type="body" sz="quarter" idx="1"/>
+          </ns0:nvPr>
+        </ns0:nvSpPr>
+        <ns0:spPr>
+          <ns1:prstGeom prst="rect">
+            <ns1:avLst/>
+          </ns1:prstGeom>
+        </ns0:spPr>
+        <ns0:txBody>
+          <ns1:bodyPr/>
+          <ns1:lstStyle/>
+          <ns1:p>
+            <ns1:pPr/>
+            <ns1:r>
+              <ns1:t/>
+            </ns1:r>
+          </ns1:p>
+          <ns1:p>
+            <ns1:pPr/>
+          </ns1:p>
+          <ns1:p>
+            <ns1:pPr/>
+            <ns1:r>
+              <ns1:t/>
+            </ns1:r>
+          </ns1:p>
+          <ns1:p>
+            <ns1:pPr/>
+            <ns1:r>
+              <ns1:t/>
+            </ns1:r>
+          </ns1:p>
+          <ns1:p>
+            <ns1:pPr/>
+          </ns1:p>
+          <ns1:p>
+            <ns1:pPr/>
+            <ns1:r>
+              <ns1:t/>
+            </ns1:r>
+          </ns1:p>
+          <ns1:p>
+            <ns1:pPr/>
+            <ns1:r>
+              <ns1:t/>
+            </ns1:r>
+          </ns1:p>
+          <ns1:p>
+            <ns1:pPr/>
+          </ns1:p>
+          <ns1:p>
+            <ns1:pPr/>
+            <ns1:r>
+              <ns1:t/>
+            </ns1:r>
+          </ns1:p>
+          <ns1:p>
+            <ns1:pPr/>
+            <ns1:r>
+              <ns1:t/>
+            </ns1:r>
+          </ns1:p>
+          <ns1:p>
+            <ns1:pPr/>
+          </ns1:p>
+          <ns1:p>
+            <ns1:pPr/>
+            <ns1:r>
+              <ns1:t/>
+            </ns1:r>
+          </ns1:p>
+          <ns1:p>
+            <ns1:pPr/>
+            <ns1:r>
+              <ns1:t/>
+            </ns1:r>
+          </ns1:p>
+          <ns1:p>
+            <ns1:pPr/>
+          </ns1:p>
+          <ns1:p>
+            <ns1:pPr/>
+            <ns1:r>
+              <ns1:t/>
+            </ns1:r>
+          </ns1:p>
+          <ns1:p>
+            <ns1:pPr/>
+            <ns1:r>
+              <ns1:t/>
+            </ns1:r>
+          </ns1:p>
+          <ns1:p>
+            <ns1:pPr/>
+          </ns1:p>
+          <ns1:p>
+            <ns1:pPr/>
+            <ns1:r>
+              <ns1:t/>
+            </ns1:r>
+          </ns1:p>
+          <ns1:p>
+            <ns1:pPr/>
+            <ns1:r>
+              <ns1:t/>
+            </ns1:r>
+          </ns1:p>
+          <ns1:p>
+            <ns1:pPr/>
+          </ns1:p>
+          <ns1:p>
+            <ns1:pPr/>
+            <ns1:r>
+              <ns1:t/>
+            </ns1:r>
+          </ns1:p>
+          <ns1:p>
+            <ns1:pPr/>
+          </ns1:p>
+          <ns1:p>
+            <ns1:pPr/>
+            <ns1:r>
+              <ns1:t/>
+            </ns1:r>
+          </ns1:p>
+          <ns1:p>
+            <ns1:pPr/>
+            <ns1:r>
+              <ns1:t/>
+            </ns1:r>
+          </ns1:p>
+          <ns1:p>
+            <ns1:pPr/>
+            <ns1:r>
+              <ns1:t/>
+            </ns1:r>
+          </ns1:p>
+          <ns1:p>
+            <ns1:pPr/>
+            <ns1:r>
+              <ns1:t/>
+            </ns1:r>
+          </ns1:p>
+          <ns1:p>
+            <ns1:pPr/>
+            <ns1:r>
+              <ns1:t/>
+            </ns1:r>
+          </ns1:p>
+          <ns1:p>
+            <ns1:pPr/>
+            <ns1:r>
+              <ns1:t/>
+            </ns1:r>
+          </ns1:p>
+          <ns1:p>
+            <ns1:pPr/>
+            <ns1:r>
+              <ns1:t/>
+            </ns1:r>
+          </ns1:p>
+          <ns1:p>
+            <ns1:pPr/>
+            <ns1:r>
+              <ns1:t/>
+            </ns1:r>
+          </ns1:p>
+          <ns1:p>
+            <ns1:pPr/>
+            <ns1:r>
+              <ns1:t/>
+            </ns1:r>
+          </ns1:p>
+          <ns1:p>
+            <ns1:pPr/>
+            <ns1:r>
+              <ns1:t/>
+            </ns1:r>
+          </ns1:p>
+        </ns0:txBody>
+      </ns0:sp>
+    </ns0:spTree>
+  </ns0:cSld>
+  <ns0:clrMapOvr>
+    <ns1:masterClrMapping/>
+  </ns0:clrMapOvr>
+</ns0:notes>
 </file>
 
 <file path=ppt/notesSlides/notesSlide2.xml><?xml version="1.0" encoding="utf-8"?>
-<p:notes xmlns:a="http://schemas.openxmlformats.org/drawingml/2006/main" xmlns:r="http://schemas.openxmlformats.org/officeDocument/2006/relationships" xmlns:p="http://schemas.openxmlformats.org/presentationml/2006/main" xmlns:m="http://schemas.openxmlformats.org/officeDocument/2006/math" xmlns:a14="http://schemas.microsoft.com/office/drawing/2010/main" showMasterSp="1" showMasterPhAnim="1">
-  <p:cSld>
-    <p:spTree>
-      <p:nvGrpSpPr>
-        <p:cNvPr id="1" name=""/>
-        <p:cNvGrpSpPr/>
-        <p:nvPr/>
-      </p:nvGrpSpPr>
-      <p:grpSpPr>
-        <a:xfrm>
-          <a:off x="0" y="0"/>
-          <a:ext cx="0" cy="0"/>
-          <a:chOff x="0" y="0"/>
-          <a:chExt cx="0" cy="0"/>
-        </a:xfrm>
-      </p:grpSpPr>
-      <p:sp>
-        <p:nvSpPr>
-          <p:cNvPr id="86" name="Shape 86"/>
-          <p:cNvSpPr/>
-          <p:nvPr>
-            <p:ph type="sldImg"/>
-          </p:nvPr>
-        </p:nvSpPr>
-        <p:spPr>
-          <a:prstGeom prst="rect">
-            <a:avLst/>
-          </a:prstGeom>
-        </p:spPr>
-        <p:txBody>
-          <a:bodyPr/>
-          <a:lstStyle/>
-          <a:p>
-            <a:pPr/>
-          </a:p>
-        </p:txBody>
-      </p:sp>
-      <p:sp>
-        <p:nvSpPr>
-          <p:cNvPr id="87" name="Shape 87"/>
-          <p:cNvSpPr/>
-          <p:nvPr>
-            <p:ph type="body" sz="quarter" idx="1"/>
-          </p:nvPr>
-        </p:nvSpPr>
-        <p:spPr>
-          <a:prstGeom prst="rect">
-            <a:avLst/>
-          </a:prstGeom>
-        </p:spPr>
-        <p:txBody>
-          <a:bodyPr/>
-          <a:lstStyle/>
-          <a:p>
-            <a:pPr/>
-            <a:r>
-              <a:t>[목표 45초]</a:t>
-            </a:r>
-          </a:p>
-          <a:p>
-            <a:pPr/>
-          </a:p>
-          <a:p>
-            <a:pPr/>
-            <a:r>
-              <a:t>예를 들어 도쿄 여행을 간다고 하면, 먼저 어디에서 밥을 먹을지 검색합니다. 한국어로 많이 소개된 곳도 좋지만, 현지어 리뷰가 많은 다른 식당도 찾아보고 싶었습니다. 그러다 마음에 드는 곳을 찾으면 이번에는 숙소와의 거리, 영업시간, 예약 방법을 따로 확인해야 했습니다.</a:t>
-            </a:r>
-          </a:p>
-          <a:p>
-            <a:pPr/>
-          </a:p>
-          <a:p>
-            <a:pPr/>
-            <a:r>
-              <a:t>이미 예약한 항공권이나 호텔 정보는 메일에 있고, 가고 싶은 장소는 지도에 있고, 하루 일정은 메모에 있었습니다. 정보를 하나씩 찾는 것보다 그걸 서로 맞춰 보는 과정이 더 번거로웠습니다.</a:t>
-            </a:r>
-          </a:p>
-          <a:p>
-            <a:pPr/>
-          </a:p>
-          <a:p>
-            <a:pPr/>
-            <a:r>
-              <a:t>그래서 고잉은 여행 하나 안에서 예약과 장소, 일정을 이어서 볼 수 있게 기획했습니다.</a:t>
-            </a:r>
-          </a:p>
-          <a:p>
-            <a:pPr/>
-          </a:p>
-          <a:p>
-            <a:pPr/>
-            <a:r>
-              <a:t>화면 안내: 식당을 고르는 질문과 예약을 확인하는 질문을 차례로 짚습니다.</a:t>
-            </a:r>
-          </a:p>
-          <a:p>
-            <a:pPr/>
-          </a:p>
-          <a:p>
-            <a:pPr/>
-            <a:r>
-              <a:t>[참고 자료 / 낭독하지 않음]</a:t>
-            </a:r>
-          </a:p>
-          <a:p>
-            <a:pPr/>
-            <a:r>
-              <a:t>구현: https://github.com/Jin-s-work/Travel-Agent</a:t>
-            </a:r>
-          </a:p>
-          <a:p>
-            <a:pPr/>
-            <a:r>
-              <a:t>메일·화면: docs/presentation/CREDITS.md (2026-10-07 합성 여행 화면)</a:t>
-            </a:r>
-          </a:p>
-          <a:p>
-            <a:pPr/>
-            <a:r>
-              <a:t>추천 모델: docs/service-v4/RECOMMENDATION_MODEL.md</a:t>
-            </a:r>
-          </a:p>
-          <a:p>
-            <a:pPr/>
-            <a:r>
-              <a:t>일정: docs/service-v2/ITINERARY_RUNBOOK.md</a:t>
-            </a:r>
-          </a:p>
-          <a:p>
-            <a:pPr/>
-            <a:r>
-              <a:t>배포 구성: docs/operations/RENDER_SUPABASE.md</a:t>
-            </a:r>
-          </a:p>
-          <a:p>
-            <a:pPr/>
-            <a:r>
-              <a:t>엄격 현지어 추천은 실제 이용 범위·언어 품질 검증 전 OFF. 100개 도시 입력은 자료 확보 수준을 뜻하지 않음.</a:t>
-            </a:r>
-          </a:p>
-          <a:p>
-            <a:pPr/>
-            <a:r>
-              <a:t>사진: Javier Lastras, Barra de Casa Lucio, CC BY 2.0 https://commons.wikimedia.org/wiki/File:Barra_de_Casa_Lucio_(4245090907).jpg</a:t>
-            </a:r>
-          </a:p>
-          <a:p>
-            <a:pPr/>
-            <a:r>
-              <a:t>사진: Tamorlan, Gallina en Pepitoria (Ciriaco), CC BY-SA 3.0 https://commons.wikimedia.org/wiki/File:Gallina_en_Pepitoria_(Ciriaco).JPG</a:t>
-            </a:r>
-          </a:p>
-          <a:p>
-            <a:pPr/>
-            <a:r>
-              <a:t>영상은 기존 실제 캡처의 편집본이며 실시간 조작이나 최신 모델 실행의 기록이 아님.</a:t>
-            </a:r>
-          </a:p>
-        </p:txBody>
-      </p:sp>
-    </p:spTree>
-  </p:cSld>
-  <p:clrMapOvr>
-    <a:masterClrMapping/>
-  </p:clrMapOvr>
-</p:notes>
+<ns0:notes xmlns:ns0="http://schemas.openxmlformats.org/presentationml/2006/main" xmlns:ns1="http://schemas.openxmlformats.org/drawingml/2006/main" showMasterSp="1" showMasterPhAnim="1">
+  <ns0:cSld>
+    <ns0:spTree>
+      <ns0:nvGrpSpPr>
+        <ns0:cNvPr id="1" name=""/>
+        <ns0:cNvGrpSpPr/>
+        <ns0:nvPr/>
+      </ns0:nvGrpSpPr>
+      <ns0:grpSpPr>
+        <ns1:xfrm>
+          <ns1:off x="0" y="0"/>
+          <ns1:ext cx="0" cy="0"/>
+          <ns1:chOff x="0" y="0"/>
+          <ns1:chExt cx="0" cy="0"/>
+        </ns1:xfrm>
+      </ns0:grpSpPr>
+      <ns0:sp>
+        <ns0:nvSpPr>
+          <ns0:cNvPr id="86" name="Shape 86"/>
+          <ns0:cNvSpPr/>
+          <ns0:nvPr>
+            <ns0:ph type="sldImg"/>
+          </ns0:nvPr>
+        </ns0:nvSpPr>
+        <ns0:spPr>
+          <ns1:prstGeom prst="rect">
+            <ns1:avLst/>
+          </ns1:prstGeom>
+        </ns0:spPr>
+        <ns0:txBody>
+          <ns1:bodyPr/>
+          <ns1:lstStyle/>
+          <ns1:p>
+            <ns1:pPr/>
+          </ns1:p>
+        </ns0:txBody>
+      </ns0:sp>
+      <ns0:sp>
+        <ns0:nvSpPr>
+          <ns0:cNvPr id="87" name="Shape 87"/>
+          <ns0:cNvSpPr/>
+          <ns0:nvPr>
+            <ns0:ph type="body" sz="quarter" idx="1"/>
+          </ns0:nvPr>
+        </ns0:nvSpPr>
+        <ns0:spPr>
+          <ns1:prstGeom prst="rect">
+            <ns1:avLst/>
+          </ns1:prstGeom>
+        </ns0:spPr>
+        <ns0:txBody>
+          <ns1:bodyPr/>
+          <ns1:lstStyle/>
+          <ns1:p>
+            <ns1:pPr/>
+            <ns1:r>
+              <ns1:t/>
+            </ns1:r>
+          </ns1:p>
+          <ns1:p>
+            <ns1:pPr/>
+          </ns1:p>
+          <ns1:p>
+            <ns1:pPr/>
+            <ns1:r>
+              <ns1:t/>
+            </ns1:r>
+          </ns1:p>
+          <ns1:p>
+            <ns1:pPr/>
+          </ns1:p>
+          <ns1:p>
+            <ns1:pPr/>
+            <ns1:r>
+              <ns1:t/>
+            </ns1:r>
+          </ns1:p>
+          <ns1:p>
+            <ns1:pPr/>
+          </ns1:p>
+          <ns1:p>
+            <ns1:pPr/>
+            <ns1:r>
+              <ns1:t/>
+            </ns1:r>
+          </ns1:p>
+          <ns1:p>
+            <ns1:pPr/>
+          </ns1:p>
+          <ns1:p>
+            <ns1:pPr/>
+            <ns1:r>
+              <ns1:t/>
+            </ns1:r>
+          </ns1:p>
+          <ns1:p>
+            <ns1:pPr/>
+          </ns1:p>
+          <ns1:p>
+            <ns1:pPr/>
+            <ns1:r>
+              <ns1:t/>
+            </ns1:r>
+          </ns1:p>
+          <ns1:p>
+            <ns1:pPr/>
+            <ns1:r>
+              <ns1:t/>
+            </ns1:r>
+          </ns1:p>
+          <ns1:p>
+            <ns1:pPr/>
+            <ns1:r>
+              <ns1:t/>
+            </ns1:r>
+          </ns1:p>
+          <ns1:p>
+            <ns1:pPr/>
+            <ns1:r>
+              <ns1:t/>
+            </ns1:r>
+          </ns1:p>
+          <ns1:p>
+            <ns1:pPr/>
+            <ns1:r>
+              <ns1:t/>
+            </ns1:r>
+          </ns1:p>
+          <ns1:p>
+            <ns1:pPr/>
+            <ns1:r>
+              <ns1:t/>
+            </ns1:r>
+          </ns1:p>
+          <ns1:p>
+            <ns1:pPr/>
+            <ns1:r>
+              <ns1:t/>
+            </ns1:r>
+          </ns1:p>
+          <ns1:p>
+            <ns1:pPr/>
+            <ns1:r>
+              <ns1:t/>
+            </ns1:r>
+          </ns1:p>
+          <ns1:p>
+            <ns1:pPr/>
+            <ns1:r>
+              <ns1:t/>
+            </ns1:r>
+          </ns1:p>
+          <ns1:p>
+            <ns1:pPr/>
+            <ns1:r>
+              <ns1:t/>
+            </ns1:r>
+          </ns1:p>
+        </ns0:txBody>
+      </ns0:sp>
+    </ns0:spTree>
+  </ns0:cSld>
+  <ns0:clrMapOvr>
+    <ns1:masterClrMapping/>
+  </ns0:clrMapOvr>
+</ns0:notes>
 </file>
 
 <file path=ppt/notesSlides/notesSlide3.xml><?xml version="1.0" encoding="utf-8"?>
-<p:notes xmlns:a="http://schemas.openxmlformats.org/drawingml/2006/main" xmlns:r="http://schemas.openxmlformats.org/officeDocument/2006/relationships" xmlns:p="http://schemas.openxmlformats.org/presentationml/2006/main" xmlns:m="http://schemas.openxmlformats.org/officeDocument/2006/math" xmlns:a14="http://schemas.microsoft.com/office/drawing/2010/main" showMasterSp="1" showMasterPhAnim="1">
-  <p:cSld>
-    <p:spTree>
-      <p:nvGrpSpPr>
-        <p:cNvPr id="1" name=""/>
-        <p:cNvGrpSpPr/>
-        <p:nvPr/>
-      </p:nvGrpSpPr>
-      <p:grpSpPr>
-        <a:xfrm>
-          <a:off x="0" y="0"/>
-          <a:ext cx="0" cy="0"/>
-          <a:chOff x="0" y="0"/>
-          <a:chExt cx="0" cy="0"/>
-        </a:xfrm>
-      </p:grpSpPr>
-      <p:sp>
-        <p:nvSpPr>
-          <p:cNvPr id="97" name="Shape 97"/>
-          <p:cNvSpPr/>
-          <p:nvPr>
-            <p:ph type="sldImg"/>
-          </p:nvPr>
-        </p:nvSpPr>
-        <p:spPr>
-          <a:prstGeom prst="rect">
-            <a:avLst/>
-          </a:prstGeom>
-        </p:spPr>
-        <p:txBody>
-          <a:bodyPr/>
-          <a:lstStyle/>
-          <a:p>
-            <a:pPr/>
-          </a:p>
-        </p:txBody>
-      </p:sp>
-      <p:sp>
-        <p:nvSpPr>
-          <p:cNvPr id="98" name="Shape 98"/>
-          <p:cNvSpPr/>
-          <p:nvPr>
-            <p:ph type="body" sz="quarter" idx="1"/>
-          </p:nvPr>
-        </p:nvSpPr>
-        <p:spPr>
-          <a:prstGeom prst="rect">
-            <a:avLst/>
-          </a:prstGeom>
-        </p:spPr>
-        <p:txBody>
-          <a:bodyPr/>
-          <a:lstStyle/>
-          <a:p>
-            <a:pPr/>
-            <a:r>
-              <a:t>[목표 35초]</a:t>
-            </a:r>
-          </a:p>
-          <a:p>
-            <a:pPr/>
-          </a:p>
-          <a:p>
-            <a:pPr/>
-            <a:r>
-              <a:t>사용할 때는 여행부터 하나 만듭니다. 도시와 날짜를 정하면 이후에 메일을 올리거나 장소를 찾을 때 같은 정보를 다시 입력하지 않아도 됩니다.</a:t>
-            </a:r>
-          </a:p>
-          <a:p>
-            <a:pPr/>
-          </a:p>
-          <a:p>
-            <a:pPr/>
-            <a:r>
-              <a:t>처음부터 숙소, 취향, 예산을 모두 쓰게 하면 오히려 여행 준비가 더 귀찮아질 수 있다고 생각했습니다. 그래서 꼭 필요한 정보로 먼저 시작하고, 숙소나 음식 취향은 필요할 때 추가하도록 했습니다.</a:t>
-            </a:r>
-          </a:p>
-          <a:p>
-            <a:pPr/>
-          </a:p>
-          <a:p>
-            <a:pPr/>
-            <a:r>
-              <a:t>예약이 있는 사람은 메일부터 올리고, 아직 아무것도 정하지 않은 사람은 장소부터 찾아볼 수 있습니다. 화면은 가상 여행을 넣어 둔 예시입니다.</a:t>
-            </a:r>
-          </a:p>
-          <a:p>
-            <a:pPr/>
-          </a:p>
-          <a:p>
-            <a:pPr/>
-            <a:r>
-              <a:t>화면 안내: 홈 화면에서 여행 기간과 세 가지 진입점을 가리킵니다.</a:t>
-            </a:r>
-          </a:p>
-          <a:p>
-            <a:pPr/>
-          </a:p>
-          <a:p>
-            <a:pPr/>
-            <a:r>
-              <a:t>[참고 자료 / 낭독하지 않음]</a:t>
-            </a:r>
-          </a:p>
-          <a:p>
-            <a:pPr/>
-            <a:r>
-              <a:t>구현: https://github.com/Jin-s-work/Travel-Agent</a:t>
-            </a:r>
-          </a:p>
-          <a:p>
-            <a:pPr/>
-            <a:r>
-              <a:t>메일·화면: docs/presentation/CREDITS.md (2026-10-07 합성 여행 화면)</a:t>
-            </a:r>
-          </a:p>
-          <a:p>
-            <a:pPr/>
-            <a:r>
-              <a:t>추천 모델: docs/service-v4/RECOMMENDATION_MODEL.md</a:t>
-            </a:r>
-          </a:p>
-          <a:p>
-            <a:pPr/>
-            <a:r>
-              <a:t>일정: docs/service-v2/ITINERARY_RUNBOOK.md</a:t>
-            </a:r>
-          </a:p>
-          <a:p>
-            <a:pPr/>
-            <a:r>
-              <a:t>배포 구성: docs/operations/RENDER_SUPABASE.md</a:t>
-            </a:r>
-          </a:p>
-          <a:p>
-            <a:pPr/>
-            <a:r>
-              <a:t>엄격 현지어 추천은 실제 이용 범위·언어 품질 검증 전 OFF. 100개 도시 입력은 자료 확보 수준을 뜻하지 않음.</a:t>
-            </a:r>
-          </a:p>
-          <a:p>
-            <a:pPr/>
-            <a:r>
-              <a:t>사진: Javier Lastras, Barra de Casa Lucio, CC BY 2.0 https://commons.wikimedia.org/wiki/File:Barra_de_Casa_Lucio_(4245090907).jpg</a:t>
-            </a:r>
-          </a:p>
-          <a:p>
-            <a:pPr/>
-            <a:r>
-              <a:t>사진: Tamorlan, Gallina en Pepitoria (Ciriaco), CC BY-SA 3.0 https://commons.wikimedia.org/wiki/File:Gallina_en_Pepitoria_(Ciriaco).JPG</a:t>
-            </a:r>
-          </a:p>
-          <a:p>
-            <a:pPr/>
-            <a:r>
-              <a:t>영상은 기존 실제 캡처의 편집본이며 실시간 조작이나 최신 모델 실행의 기록이 아님.</a:t>
-            </a:r>
-          </a:p>
-        </p:txBody>
-      </p:sp>
-    </p:spTree>
-  </p:cSld>
-  <p:clrMapOvr>
-    <a:masterClrMapping/>
-  </p:clrMapOvr>
-</p:notes>
+<ns0:notes xmlns:ns0="http://schemas.openxmlformats.org/presentationml/2006/main" xmlns:ns1="http://schemas.openxmlformats.org/drawingml/2006/main" showMasterSp="1" showMasterPhAnim="1">
+  <ns0:cSld>
+    <ns0:spTree>
+      <ns0:nvGrpSpPr>
+        <ns0:cNvPr id="1" name=""/>
+        <ns0:cNvGrpSpPr/>
+        <ns0:nvPr/>
+      </ns0:nvGrpSpPr>
+      <ns0:grpSpPr>
+        <ns1:xfrm>
+          <ns1:off x="0" y="0"/>
+          <ns1:ext cx="0" cy="0"/>
+          <ns1:chOff x="0" y="0"/>
+          <ns1:chExt cx="0" cy="0"/>
+        </ns1:xfrm>
+      </ns0:grpSpPr>
+      <ns0:sp>
+        <ns0:nvSpPr>
+          <ns0:cNvPr id="97" name="Shape 97"/>
+          <ns0:cNvSpPr/>
+          <ns0:nvPr>
+            <ns0:ph type="sldImg"/>
+          </ns0:nvPr>
+        </ns0:nvSpPr>
+        <ns0:spPr>
+          <ns1:prstGeom prst="rect">
+            <ns1:avLst/>
+          </ns1:prstGeom>
+        </ns0:spPr>
+        <ns0:txBody>
+          <ns1:bodyPr/>
+          <ns1:lstStyle/>
+          <ns1:p>
+            <ns1:pPr/>
+          </ns1:p>
+        </ns0:txBody>
+      </ns0:sp>
+      <ns0:sp>
+        <ns0:nvSpPr>
+          <ns0:cNvPr id="98" name="Shape 98"/>
+          <ns0:cNvSpPr/>
+          <ns0:nvPr>
+            <ns0:ph type="body" sz="quarter" idx="1"/>
+          </ns0:nvPr>
+        </ns0:nvSpPr>
+        <ns0:spPr>
+          <ns1:prstGeom prst="rect">
+            <ns1:avLst/>
+          </ns1:prstGeom>
+        </ns0:spPr>
+        <ns0:txBody>
+          <ns1:bodyPr/>
+          <ns1:lstStyle/>
+          <ns1:p>
+            <ns1:pPr/>
+            <ns1:r>
+              <ns1:t/>
+            </ns1:r>
+          </ns1:p>
+          <ns1:p>
+            <ns1:pPr/>
+          </ns1:p>
+          <ns1:p>
+            <ns1:pPr/>
+            <ns1:r>
+              <ns1:t/>
+            </ns1:r>
+          </ns1:p>
+          <ns1:p>
+            <ns1:pPr/>
+          </ns1:p>
+          <ns1:p>
+            <ns1:pPr/>
+            <ns1:r>
+              <ns1:t/>
+            </ns1:r>
+          </ns1:p>
+          <ns1:p>
+            <ns1:pPr/>
+          </ns1:p>
+          <ns1:p>
+            <ns1:pPr/>
+            <ns1:r>
+              <ns1:t/>
+            </ns1:r>
+          </ns1:p>
+          <ns1:p>
+            <ns1:pPr/>
+          </ns1:p>
+          <ns1:p>
+            <ns1:pPr/>
+            <ns1:r>
+              <ns1:t/>
+            </ns1:r>
+          </ns1:p>
+          <ns1:p>
+            <ns1:pPr/>
+          </ns1:p>
+          <ns1:p>
+            <ns1:pPr/>
+            <ns1:r>
+              <ns1:t/>
+            </ns1:r>
+          </ns1:p>
+          <ns1:p>
+            <ns1:pPr/>
+            <ns1:r>
+              <ns1:t/>
+            </ns1:r>
+          </ns1:p>
+          <ns1:p>
+            <ns1:pPr/>
+            <ns1:r>
+              <ns1:t/>
+            </ns1:r>
+          </ns1:p>
+          <ns1:p>
+            <ns1:pPr/>
+            <ns1:r>
+              <ns1:t/>
+            </ns1:r>
+          </ns1:p>
+          <ns1:p>
+            <ns1:pPr/>
+            <ns1:r>
+              <ns1:t/>
+            </ns1:r>
+          </ns1:p>
+          <ns1:p>
+            <ns1:pPr/>
+            <ns1:r>
+              <ns1:t/>
+            </ns1:r>
+          </ns1:p>
+          <ns1:p>
+            <ns1:pPr/>
+            <ns1:r>
+              <ns1:t/>
+            </ns1:r>
+          </ns1:p>
+          <ns1:p>
+            <ns1:pPr/>
+            <ns1:r>
+              <ns1:t/>
+            </ns1:r>
+          </ns1:p>
+          <ns1:p>
+            <ns1:pPr/>
+            <ns1:r>
+              <ns1:t/>
+            </ns1:r>
+          </ns1:p>
+          <ns1:p>
+            <ns1:pPr/>
+            <ns1:r>
+              <ns1:t/>
+            </ns1:r>
+          </ns1:p>
+        </ns0:txBody>
+      </ns0:sp>
+    </ns0:spTree>
+  </ns0:cSld>
+  <ns0:clrMapOvr>
+    <ns1:masterClrMapping/>
+  </ns0:clrMapOvr>
+</ns0:notes>
 </file>
 
 <file path=ppt/notesSlides/notesSlide4.xml><?xml version="1.0" encoding="utf-8"?>
-<p:notes xmlns:a="http://schemas.openxmlformats.org/drawingml/2006/main" xmlns:r="http://schemas.openxmlformats.org/officeDocument/2006/relationships" xmlns:p="http://schemas.openxmlformats.org/presentationml/2006/main" xmlns:m="http://schemas.openxmlformats.org/officeDocument/2006/math" xmlns:a14="http://schemas.microsoft.com/office/drawing/2010/main" showMasterSp="1" showMasterPhAnim="1">
-  <p:cSld>
-    <p:spTree>
-      <p:nvGrpSpPr>
-        <p:cNvPr id="1" name=""/>
-        <p:cNvGrpSpPr/>
-        <p:nvPr/>
-      </p:nvGrpSpPr>
-      <p:grpSpPr>
-        <a:xfrm>
-          <a:off x="0" y="0"/>
-          <a:ext cx="0" cy="0"/>
-          <a:chOff x="0" y="0"/>
-          <a:chExt cx="0" cy="0"/>
-        </a:xfrm>
-      </p:grpSpPr>
-      <p:sp>
-        <p:nvSpPr>
-          <p:cNvPr id="109" name="Shape 109"/>
-          <p:cNvSpPr/>
-          <p:nvPr>
-            <p:ph type="sldImg"/>
-          </p:nvPr>
-        </p:nvSpPr>
-        <p:spPr>
-          <a:prstGeom prst="rect">
-            <a:avLst/>
-          </a:prstGeom>
-        </p:spPr>
-        <p:txBody>
-          <a:bodyPr/>
-          <a:lstStyle/>
-          <a:p>
-            <a:pPr/>
-          </a:p>
-        </p:txBody>
-      </p:sp>
-      <p:sp>
-        <p:nvSpPr>
-          <p:cNvPr id="110" name="Shape 110"/>
-          <p:cNvSpPr/>
-          <p:nvPr>
-            <p:ph type="body" sz="quarter" idx="1"/>
-          </p:nvPr>
-        </p:nvSpPr>
-        <p:spPr>
-          <a:prstGeom prst="rect">
-            <a:avLst/>
-          </a:prstGeom>
-        </p:spPr>
-        <p:txBody>
-          <a:bodyPr/>
-          <a:lstStyle/>
-          <a:p>
-            <a:pPr/>
-            <a:r>
-              <a:t>[목표 50초]</a:t>
-            </a:r>
-          </a:p>
-          <a:p>
-            <a:pPr/>
-          </a:p>
-          <a:p>
-            <a:pPr/>
-            <a:r>
-              <a:t>가장 먼저 만든 기능은 예약 메일 분석이었습니다. 항공권이나 숙소 확인 메일을 올리면 날짜, 시간, 장소 같은 내용을 예약으로 정리합니다. 한 메일에 여러 예약이 있거나 왕복 항공편이 들어 있는 경우도 구분해서 보관합니다.</a:t>
-            </a:r>
-          </a:p>
-          <a:p>
-            <a:pPr/>
-          </a:p>
-          <a:p>
-            <a:pPr/>
-            <a:r>
-              <a:t>이때 AI가 읽은 내용을 바로 확정된 사실로 취급하지는 않습니다. 사용자가 확인하고 잘못된 값을 수정할 수 있게 했습니다. 사용자가 고친 값은 원래 추출한 값과 따로 저장해서 다시 분석해도 사라지지 않도록 했습니다.</a:t>
-            </a:r>
-          </a:p>
-          <a:p>
-            <a:pPr/>
-          </a:p>
-          <a:p>
-            <a:pPr/>
-            <a:r>
-              <a:t>실제 AI 분석에는 OpenAI gpt-5-mini를 사용합니다. 지금 화면은 발표용 가상 메일을 비용 없는 기본 분석으로 처리한 예시입니다. 분석이 실패했을 때 기존 예약을 지우지 않고, 작업 상태를 다시 확인할 수 있도록 만드는 데도 신경 썼습니다.</a:t>
-            </a:r>
-          </a:p>
-          <a:p>
-            <a:pPr/>
-          </a:p>
-          <a:p>
-            <a:pPr/>
-            <a:r>
-              <a:t>화면 안내: 호텔의 체크인·체크아웃 시간과 확인 필요 상태를 짚습니다.</a:t>
-            </a:r>
-          </a:p>
-          <a:p>
-            <a:pPr/>
-          </a:p>
-          <a:p>
-            <a:pPr/>
-            <a:r>
-              <a:t>[참고 자료 / 낭독하지 않음]</a:t>
-            </a:r>
-          </a:p>
-          <a:p>
-            <a:pPr/>
-            <a:r>
-              <a:t>구현: https://github.com/Jin-s-work/Travel-Agent</a:t>
-            </a:r>
-          </a:p>
-          <a:p>
-            <a:pPr/>
-            <a:r>
-              <a:t>메일·화면: docs/presentation/CREDITS.md (2026-10-07 합성 여행 화면)</a:t>
-            </a:r>
-          </a:p>
-          <a:p>
-            <a:pPr/>
-            <a:r>
-              <a:t>추천 모델: docs/service-v4/RECOMMENDATION_MODEL.md</a:t>
-            </a:r>
-          </a:p>
-          <a:p>
-            <a:pPr/>
-            <a:r>
-              <a:t>일정: docs/service-v2/ITINERARY_RUNBOOK.md</a:t>
-            </a:r>
-          </a:p>
-          <a:p>
-            <a:pPr/>
-            <a:r>
-              <a:t>배포 구성: docs/operations/RENDER_SUPABASE.md</a:t>
-            </a:r>
-          </a:p>
-          <a:p>
-            <a:pPr/>
-            <a:r>
-              <a:t>엄격 현지어 추천은 실제 이용 범위·언어 품질 검증 전 OFF. 100개 도시 입력은 자료 확보 수준을 뜻하지 않음.</a:t>
-            </a:r>
-          </a:p>
-          <a:p>
-            <a:pPr/>
-            <a:r>
-              <a:t>사진: Javier Lastras, Barra de Casa Lucio, CC BY 2.0 https://commons.wikimedia.org/wiki/File:Barra_de_Casa_Lucio_(4245090907).jpg</a:t>
-            </a:r>
-          </a:p>
-          <a:p>
-            <a:pPr/>
-            <a:r>
-              <a:t>사진: Tamorlan, Gallina en Pepitoria (Ciriaco), CC BY-SA 3.0 https://commons.wikimedia.org/wiki/File:Gallina_en_Pepitoria_(Ciriaco).JPG</a:t>
-            </a:r>
-          </a:p>
-          <a:p>
-            <a:pPr/>
-            <a:r>
-              <a:t>영상은 기존 실제 캡처의 편집본이며 실시간 조작이나 최신 모델 실행의 기록이 아님.</a:t>
-            </a:r>
-          </a:p>
-        </p:txBody>
-      </p:sp>
-    </p:spTree>
-  </p:cSld>
-  <p:clrMapOvr>
-    <a:masterClrMapping/>
-  </p:clrMapOvr>
-</p:notes>
+<ns0:notes xmlns:ns0="http://schemas.openxmlformats.org/presentationml/2006/main" xmlns:ns1="http://schemas.openxmlformats.org/drawingml/2006/main" showMasterSp="1" showMasterPhAnim="1">
+  <ns0:cSld>
+    <ns0:spTree>
+      <ns0:nvGrpSpPr>
+        <ns0:cNvPr id="1" name=""/>
+        <ns0:cNvGrpSpPr/>
+        <ns0:nvPr/>
+      </ns0:nvGrpSpPr>
+      <ns0:grpSpPr>
+        <ns1:xfrm>
+          <ns1:off x="0" y="0"/>
+          <ns1:ext cx="0" cy="0"/>
+          <ns1:chOff x="0" y="0"/>
+          <ns1:chExt cx="0" cy="0"/>
+        </ns1:xfrm>
+      </ns0:grpSpPr>
+      <ns0:sp>
+        <ns0:nvSpPr>
+          <ns0:cNvPr id="109" name="Shape 109"/>
+          <ns0:cNvSpPr/>
+          <ns0:nvPr>
+            <ns0:ph type="sldImg"/>
+          </ns0:nvPr>
+        </ns0:nvSpPr>
+        <ns0:spPr>
+          <ns1:prstGeom prst="rect">
+            <ns1:avLst/>
+          </ns1:prstGeom>
+        </ns0:spPr>
+        <ns0:txBody>
+          <ns1:bodyPr/>
+          <ns1:lstStyle/>
+          <ns1:p>
+            <ns1:pPr/>
+          </ns1:p>
+        </ns0:txBody>
+      </ns0:sp>
+      <ns0:sp>
+        <ns0:nvSpPr>
+          <ns0:cNvPr id="110" name="Shape 110"/>
+          <ns0:cNvSpPr/>
+          <ns0:nvPr>
+            <ns0:ph type="body" sz="quarter" idx="1"/>
+          </ns0:nvPr>
+        </ns0:nvSpPr>
+        <ns0:spPr>
+          <ns1:prstGeom prst="rect">
+            <ns1:avLst/>
+          </ns1:prstGeom>
+        </ns0:spPr>
+        <ns0:txBody>
+          <ns1:bodyPr/>
+          <ns1:lstStyle/>
+          <ns1:p>
+            <ns1:pPr/>
+            <ns1:r>
+              <ns1:t/>
+            </ns1:r>
+          </ns1:p>
+          <ns1:p>
+            <ns1:pPr/>
+          </ns1:p>
+          <ns1:p>
+            <ns1:pPr/>
+            <ns1:r>
+              <ns1:t/>
+            </ns1:r>
+          </ns1:p>
+          <ns1:p>
+            <ns1:pPr/>
+          </ns1:p>
+          <ns1:p>
+            <ns1:pPr/>
+            <ns1:r>
+              <ns1:t/>
+            </ns1:r>
+          </ns1:p>
+          <ns1:p>
+            <ns1:pPr/>
+          </ns1:p>
+          <ns1:p>
+            <ns1:pPr/>
+            <ns1:r>
+              <ns1:t/>
+            </ns1:r>
+          </ns1:p>
+          <ns1:p>
+            <ns1:pPr/>
+          </ns1:p>
+          <ns1:p>
+            <ns1:pPr/>
+            <ns1:r>
+              <ns1:t/>
+            </ns1:r>
+          </ns1:p>
+          <ns1:p>
+            <ns1:pPr/>
+          </ns1:p>
+          <ns1:p>
+            <ns1:pPr/>
+            <ns1:r>
+              <ns1:t/>
+            </ns1:r>
+          </ns1:p>
+          <ns1:p>
+            <ns1:pPr/>
+            <ns1:r>
+              <ns1:t/>
+            </ns1:r>
+          </ns1:p>
+          <ns1:p>
+            <ns1:pPr/>
+            <ns1:r>
+              <ns1:t/>
+            </ns1:r>
+          </ns1:p>
+          <ns1:p>
+            <ns1:pPr/>
+            <ns1:r>
+              <ns1:t/>
+            </ns1:r>
+          </ns1:p>
+          <ns1:p>
+            <ns1:pPr/>
+            <ns1:r>
+              <ns1:t/>
+            </ns1:r>
+          </ns1:p>
+          <ns1:p>
+            <ns1:pPr/>
+            <ns1:r>
+              <ns1:t/>
+            </ns1:r>
+          </ns1:p>
+          <ns1:p>
+            <ns1:pPr/>
+            <ns1:r>
+              <ns1:t/>
+            </ns1:r>
+          </ns1:p>
+          <ns1:p>
+            <ns1:pPr/>
+            <ns1:r>
+              <ns1:t/>
+            </ns1:r>
+          </ns1:p>
+          <ns1:p>
+            <ns1:pPr/>
+            <ns1:r>
+              <ns1:t/>
+            </ns1:r>
+          </ns1:p>
+          <ns1:p>
+            <ns1:pPr/>
+            <ns1:r>
+              <ns1:t/>
+            </ns1:r>
+          </ns1:p>
+        </ns0:txBody>
+      </ns0:sp>
+    </ns0:spTree>
+  </ns0:cSld>
+  <ns0:clrMapOvr>
+    <ns1:masterClrMapping/>
+  </ns0:clrMapOvr>
+</ns0:notes>
 </file>
 
 <file path=ppt/notesSlides/notesSlide5.xml><?xml version="1.0" encoding="utf-8"?>
-<p:notes xmlns:a="http://schemas.openxmlformats.org/drawingml/2006/main" xmlns:r="http://schemas.openxmlformats.org/officeDocument/2006/relationships" xmlns:p="http://schemas.openxmlformats.org/presentationml/2006/main" xmlns:m="http://schemas.openxmlformats.org/officeDocument/2006/math" xmlns:a14="http://schemas.microsoft.com/office/drawing/2010/main" showMasterSp="1" showMasterPhAnim="1">
-  <p:cSld>
-    <p:spTree>
-      <p:nvGrpSpPr>
-        <p:cNvPr id="1" name=""/>
-        <p:cNvGrpSpPr/>
-        <p:nvPr/>
-      </p:nvGrpSpPr>
-      <p:grpSpPr>
-        <a:xfrm>
-          <a:off x="0" y="0"/>
-          <a:ext cx="0" cy="0"/>
-          <a:chOff x="0" y="0"/>
-          <a:chExt cx="0" cy="0"/>
-        </a:xfrm>
-      </p:grpSpPr>
-      <p:sp>
-        <p:nvSpPr>
-          <p:cNvPr id="119" name="Shape 119"/>
-          <p:cNvSpPr/>
-          <p:nvPr>
-            <p:ph type="sldImg"/>
-          </p:nvPr>
-        </p:nvSpPr>
-        <p:spPr>
-          <a:prstGeom prst="rect">
-            <a:avLst/>
-          </a:prstGeom>
-        </p:spPr>
-        <p:txBody>
-          <a:bodyPr/>
-          <a:lstStyle/>
-          <a:p>
-            <a:pPr/>
-          </a:p>
-        </p:txBody>
-      </p:sp>
-      <p:sp>
-        <p:nvSpPr>
-          <p:cNvPr id="120" name="Shape 120"/>
-          <p:cNvSpPr/>
-          <p:nvPr>
-            <p:ph type="body" sz="quarter" idx="1"/>
-          </p:nvPr>
-        </p:nvSpPr>
-        <p:spPr>
-          <a:prstGeom prst="rect">
-            <a:avLst/>
-          </a:prstGeom>
-        </p:spPr>
-        <p:txBody>
-          <a:bodyPr/>
-          <a:lstStyle/>
-          <a:p>
-            <a:pPr/>
-            <a:r>
-              <a:t>[목표 40초]</a:t>
-            </a:r>
-          </a:p>
-          <a:p>
-            <a:pPr/>
-          </a:p>
-          <a:p>
-            <a:pPr/>
-            <a:r>
-              <a:t>예약을 모아 두면 이렇게 날짜별로 질문할 수 있습니다. 예를 들어 2일차 예약을 전부 알려 달라고 하면, 그 날짜에 해당하는 예약을 가져옵니다. 검색 점수가 높은 몇 개만 가져오면 예약이 빠질 수 있기 때문에 날짜 질문은 저장된 예약을 날짜 범위로 조회하게 했습니다.</a:t>
-            </a:r>
-          </a:p>
-          <a:p>
-            <a:pPr/>
-          </a:p>
-          <a:p>
-            <a:pPr/>
-            <a:r>
-              <a:t>환불 규정처럼 메일 본문을 읽어야 하는 질문은 관련 내용을 검색해서 답하고, 답변의 근거도 같이 보여줍니다. 오른쪽에서 어떤 메일이나 직접 입력한 예약을 참고했는지 확인할 수 있습니다.</a:t>
-            </a:r>
-          </a:p>
-          <a:p>
-            <a:pPr/>
-          </a:p>
-          <a:p>
-            <a:pPr/>
-            <a:r>
-              <a:t>제가 원했던 것은 답변을 받은 뒤에도 필요하면 원문을 바로 확인할 수 있는 흐름이었습니다.</a:t>
-            </a:r>
-          </a:p>
-          <a:p>
-            <a:pPr/>
-          </a:p>
-          <a:p>
-            <a:pPr/>
-            <a:r>
-              <a:t>화면 안내: 왼쪽 답변의 예약 목록과 오른쪽 원문 근거를 연결해 설명합니다.</a:t>
-            </a:r>
-          </a:p>
-          <a:p>
-            <a:pPr/>
-          </a:p>
-          <a:p>
-            <a:pPr/>
-            <a:r>
-              <a:t>[참고 자료 / 낭독하지 않음]</a:t>
-            </a:r>
-          </a:p>
-          <a:p>
-            <a:pPr/>
-            <a:r>
-              <a:t>구현: https://github.com/Jin-s-work/Travel-Agent</a:t>
-            </a:r>
-          </a:p>
-          <a:p>
-            <a:pPr/>
-            <a:r>
-              <a:t>메일·화면: docs/presentation/CREDITS.md (2026-10-07 합성 여행 화면)</a:t>
-            </a:r>
-          </a:p>
-          <a:p>
-            <a:pPr/>
-            <a:r>
-              <a:t>추천 모델: docs/service-v4/RECOMMENDATION_MODEL.md</a:t>
-            </a:r>
-          </a:p>
-          <a:p>
-            <a:pPr/>
-            <a:r>
-              <a:t>일정: docs/service-v2/ITINERARY_RUNBOOK.md</a:t>
-            </a:r>
-          </a:p>
-          <a:p>
-            <a:pPr/>
-            <a:r>
-              <a:t>배포 구성: docs/operations/RENDER_SUPABASE.md</a:t>
-            </a:r>
-          </a:p>
-          <a:p>
-            <a:pPr/>
-            <a:r>
-              <a:t>엄격 현지어 추천은 실제 이용 범위·언어 품질 검증 전 OFF. 100개 도시 입력은 자료 확보 수준을 뜻하지 않음.</a:t>
-            </a:r>
-          </a:p>
-          <a:p>
-            <a:pPr/>
-            <a:r>
-              <a:t>사진: Javier Lastras, Barra de Casa Lucio, CC BY 2.0 https://commons.wikimedia.org/wiki/File:Barra_de_Casa_Lucio_(4245090907).jpg</a:t>
-            </a:r>
-          </a:p>
-          <a:p>
-            <a:pPr/>
-            <a:r>
-              <a:t>사진: Tamorlan, Gallina en Pepitoria (Ciriaco), CC BY-SA 3.0 https://commons.wikimedia.org/wiki/File:Gallina_en_Pepitoria_(Ciriaco).JPG</a:t>
-            </a:r>
-          </a:p>
-          <a:p>
-            <a:pPr/>
-            <a:r>
-              <a:t>영상은 기존 실제 캡처의 편집본이며 실시간 조작이나 최신 모델 실행의 기록이 아님.</a:t>
-            </a:r>
-          </a:p>
-        </p:txBody>
-      </p:sp>
-    </p:spTree>
-  </p:cSld>
-  <p:clrMapOvr>
-    <a:masterClrMapping/>
-  </p:clrMapOvr>
-</p:notes>
+<ns0:notes xmlns:ns0="http://schemas.openxmlformats.org/presentationml/2006/main" xmlns:ns1="http://schemas.openxmlformats.org/drawingml/2006/main" showMasterSp="1" showMasterPhAnim="1">
+  <ns0:cSld>
+    <ns0:spTree>
+      <ns0:nvGrpSpPr>
+        <ns0:cNvPr id="1" name=""/>
+        <ns0:cNvGrpSpPr/>
+        <ns0:nvPr/>
+      </ns0:nvGrpSpPr>
+      <ns0:grpSpPr>
+        <ns1:xfrm>
+          <ns1:off x="0" y="0"/>
+          <ns1:ext cx="0" cy="0"/>
+          <ns1:chOff x="0" y="0"/>
+          <ns1:chExt cx="0" cy="0"/>
+        </ns1:xfrm>
+      </ns0:grpSpPr>
+      <ns0:sp>
+        <ns0:nvSpPr>
+          <ns0:cNvPr id="119" name="Shape 119"/>
+          <ns0:cNvSpPr/>
+          <ns0:nvPr>
+            <ns0:ph type="sldImg"/>
+          </ns0:nvPr>
+        </ns0:nvSpPr>
+        <ns0:spPr>
+          <ns1:prstGeom prst="rect">
+            <ns1:avLst/>
+          </ns1:prstGeom>
+        </ns0:spPr>
+        <ns0:txBody>
+          <ns1:bodyPr/>
+          <ns1:lstStyle/>
+          <ns1:p>
+            <ns1:pPr/>
+          </ns1:p>
+        </ns0:txBody>
+      </ns0:sp>
+      <ns0:sp>
+        <ns0:nvSpPr>
+          <ns0:cNvPr id="120" name="Shape 120"/>
+          <ns0:cNvSpPr/>
+          <ns0:nvPr>
+            <ns0:ph type="body" sz="quarter" idx="1"/>
+          </ns0:nvPr>
+        </ns0:nvSpPr>
+        <ns0:spPr>
+          <ns1:prstGeom prst="rect">
+            <ns1:avLst/>
+          </ns1:prstGeom>
+        </ns0:spPr>
+        <ns0:txBody>
+          <ns1:bodyPr/>
+          <ns1:lstStyle/>
+          <ns1:p>
+            <ns1:pPr/>
+            <ns1:r>
+              <ns1:t/>
+            </ns1:r>
+          </ns1:p>
+          <ns1:p>
+            <ns1:pPr/>
+          </ns1:p>
+          <ns1:p>
+            <ns1:pPr/>
+            <ns1:r>
+              <ns1:t/>
+            </ns1:r>
+          </ns1:p>
+          <ns1:p>
+            <ns1:pPr/>
+          </ns1:p>
+          <ns1:p>
+            <ns1:pPr/>
+            <ns1:r>
+              <ns1:t/>
+            </ns1:r>
+          </ns1:p>
+          <ns1:p>
+            <ns1:pPr/>
+          </ns1:p>
+          <ns1:p>
+            <ns1:pPr/>
+            <ns1:r>
+              <ns1:t/>
+            </ns1:r>
+          </ns1:p>
+          <ns1:p>
+            <ns1:pPr/>
+          </ns1:p>
+          <ns1:p>
+            <ns1:pPr/>
+            <ns1:r>
+              <ns1:t/>
+            </ns1:r>
+          </ns1:p>
+          <ns1:p>
+            <ns1:pPr/>
+          </ns1:p>
+          <ns1:p>
+            <ns1:pPr/>
+            <ns1:r>
+              <ns1:t/>
+            </ns1:r>
+          </ns1:p>
+          <ns1:p>
+            <ns1:pPr/>
+            <ns1:r>
+              <ns1:t/>
+            </ns1:r>
+          </ns1:p>
+          <ns1:p>
+            <ns1:pPr/>
+            <ns1:r>
+              <ns1:t/>
+            </ns1:r>
+          </ns1:p>
+          <ns1:p>
+            <ns1:pPr/>
+            <ns1:r>
+              <ns1:t/>
+            </ns1:r>
+          </ns1:p>
+          <ns1:p>
+            <ns1:pPr/>
+            <ns1:r>
+              <ns1:t/>
+            </ns1:r>
+          </ns1:p>
+          <ns1:p>
+            <ns1:pPr/>
+            <ns1:r>
+              <ns1:t/>
+            </ns1:r>
+          </ns1:p>
+          <ns1:p>
+            <ns1:pPr/>
+            <ns1:r>
+              <ns1:t/>
+            </ns1:r>
+          </ns1:p>
+          <ns1:p>
+            <ns1:pPr/>
+            <ns1:r>
+              <ns1:t/>
+            </ns1:r>
+          </ns1:p>
+          <ns1:p>
+            <ns1:pPr/>
+            <ns1:r>
+              <ns1:t/>
+            </ns1:r>
+          </ns1:p>
+          <ns1:p>
+            <ns1:pPr/>
+            <ns1:r>
+              <ns1:t/>
+            </ns1:r>
+          </ns1:p>
+        </ns0:txBody>
+      </ns0:sp>
+    </ns0:spTree>
+  </ns0:cSld>
+  <ns0:clrMapOvr>
+    <ns1:masterClrMapping/>
+  </ns0:clrMapOvr>
+</ns0:notes>
 </file>
 
 <file path=ppt/notesSlides/notesSlide6.xml><?xml version="1.0" encoding="utf-8"?>
-<p:notes xmlns:a="http://schemas.openxmlformats.org/drawingml/2006/main" xmlns:r="http://schemas.openxmlformats.org/officeDocument/2006/relationships" xmlns:p="http://schemas.openxmlformats.org/presentationml/2006/main" xmlns:m="http://schemas.openxmlformats.org/officeDocument/2006/math" xmlns:a14="http://schemas.microsoft.com/office/drawing/2010/main" showMasterSp="1" showMasterPhAnim="1">
-  <p:cSld>
-    <p:spTree>
-      <p:nvGrpSpPr>
-        <p:cNvPr id="1" name=""/>
-        <p:cNvGrpSpPr/>
-        <p:nvPr/>
-      </p:nvGrpSpPr>
-      <p:grpSpPr>
-        <a:xfrm>
-          <a:off x="0" y="0"/>
-          <a:ext cx="0" cy="0"/>
-          <a:chOff x="0" y="0"/>
-          <a:chExt cx="0" cy="0"/>
-        </a:xfrm>
-      </p:grpSpPr>
-      <p:sp>
-        <p:nvSpPr>
-          <p:cNvPr id="131" name="Shape 131"/>
-          <p:cNvSpPr/>
-          <p:nvPr>
-            <p:ph type="sldImg"/>
-          </p:nvPr>
-        </p:nvSpPr>
-        <p:spPr>
-          <a:prstGeom prst="rect">
-            <a:avLst/>
-          </a:prstGeom>
-        </p:spPr>
-        <p:txBody>
-          <a:bodyPr/>
-          <a:lstStyle/>
-          <a:p>
-            <a:pPr/>
-          </a:p>
-        </p:txBody>
-      </p:sp>
-      <p:sp>
-        <p:nvSpPr>
-          <p:cNvPr id="132" name="Shape 132"/>
-          <p:cNvSpPr/>
-          <p:nvPr>
-            <p:ph type="body" sz="quarter" idx="1"/>
-          </p:nvPr>
-        </p:nvSpPr>
-        <p:spPr>
-          <a:prstGeom prst="rect">
-            <a:avLst/>
-          </a:prstGeom>
-        </p:spPr>
-        <p:txBody>
-          <a:bodyPr/>
-          <a:lstStyle/>
-          <a:p>
-            <a:pPr/>
-            <a:r>
-              <a:t>[목표 40초]</a:t>
-            </a:r>
-          </a:p>
-          <a:p>
-            <a:pPr/>
-          </a:p>
-          <a:p>
-            <a:pPr/>
-            <a:r>
-              <a:t>장소를 찾을 때는 이름과 평점만 보는 것보다 내부나 음식 사진이 같이 있으면 고르기 편했습니다. 그래서 이용 가능한 사진이 있는 장소는 최대 세 장까지 보여주고, 추천 이유와 확인할 조건도 함께 배치했습니다.</a:t>
-            </a:r>
-          </a:p>
-          <a:p>
-            <a:pPr/>
-          </a:p>
-          <a:p>
-            <a:pPr/>
-            <a:r>
-              <a:t>상세에서는 영업시간, 예약 방법, 가격과 그 출처를 확인할 수 있습니다. 마음에 들면 저장하고 같은 방문일과 인원 조건으로 최대 세 곳을 비교할 수 있습니다. 숙소 위치가 확인되면 거리도 참고합니다.</a:t>
-            </a:r>
-          </a:p>
-          <a:p>
-            <a:pPr/>
-          </a:p>
-          <a:p>
-            <a:pPr/>
-            <a:r>
-              <a:t>화면에 보이는 곳은 마드리드의 실제 식당입니다. 다만 미래 방문일의 영업이나 잔여석은 확인하지 못했기 때문에 방문 전 확인이 필요하다고 표시합니다. 사진이 있다고 예약할 수 있다고 말하지는 않습니다.</a:t>
-            </a:r>
-          </a:p>
-          <a:p>
-            <a:pPr/>
-          </a:p>
-          <a:p>
-            <a:pPr/>
-            <a:r>
-              <a:t>화면 안내: 음식 사진과 방문 전 확인 필요 문구를 함께 짚습니다.</a:t>
-            </a:r>
-          </a:p>
-          <a:p>
-            <a:pPr/>
-          </a:p>
-          <a:p>
-            <a:pPr/>
-            <a:r>
-              <a:t>[참고 자료 / 낭독하지 않음]</a:t>
-            </a:r>
-          </a:p>
-          <a:p>
-            <a:pPr/>
-            <a:r>
-              <a:t>구현: https://github.com/Jin-s-work/Travel-Agent</a:t>
-            </a:r>
-          </a:p>
-          <a:p>
-            <a:pPr/>
-            <a:r>
-              <a:t>메일·화면: docs/presentation/CREDITS.md (2026-10-07 합성 여행 화면)</a:t>
-            </a:r>
-          </a:p>
-          <a:p>
-            <a:pPr/>
-            <a:r>
-              <a:t>추천 모델: docs/service-v4/RECOMMENDATION_MODEL.md</a:t>
-            </a:r>
-          </a:p>
-          <a:p>
-            <a:pPr/>
-            <a:r>
-              <a:t>일정: docs/service-v2/ITINERARY_RUNBOOK.md</a:t>
-            </a:r>
-          </a:p>
-          <a:p>
-            <a:pPr/>
-            <a:r>
-              <a:t>배포 구성: docs/operations/RENDER_SUPABASE.md</a:t>
-            </a:r>
-          </a:p>
-          <a:p>
-            <a:pPr/>
-            <a:r>
-              <a:t>엄격 현지어 추천은 실제 이용 범위·언어 품질 검증 전 OFF. 100개 도시 입력은 자료 확보 수준을 뜻하지 않음.</a:t>
-            </a:r>
-          </a:p>
-          <a:p>
-            <a:pPr/>
-            <a:r>
-              <a:t>사진: Javier Lastras, Barra de Casa Lucio, CC BY 2.0 https://commons.wikimedia.org/wiki/File:Barra_de_Casa_Lucio_(4245090907).jpg</a:t>
-            </a:r>
-          </a:p>
-          <a:p>
-            <a:pPr/>
-            <a:r>
-              <a:t>사진: Tamorlan, Gallina en Pepitoria (Ciriaco), CC BY-SA 3.0 https://commons.wikimedia.org/wiki/File:Gallina_en_Pepitoria_(Ciriaco).JPG</a:t>
-            </a:r>
-          </a:p>
-          <a:p>
-            <a:pPr/>
-            <a:r>
-              <a:t>영상은 기존 실제 캡처의 편집본이며 실시간 조작이나 최신 모델 실행의 기록이 아님.</a:t>
-            </a:r>
-          </a:p>
-        </p:txBody>
-      </p:sp>
-    </p:spTree>
-  </p:cSld>
-  <p:clrMapOvr>
-    <a:masterClrMapping/>
-  </p:clrMapOvr>
-</p:notes>
+<ns0:notes xmlns:ns0="http://schemas.openxmlformats.org/presentationml/2006/main" xmlns:ns1="http://schemas.openxmlformats.org/drawingml/2006/main" showMasterSp="1" showMasterPhAnim="1">
+  <ns0:cSld>
+    <ns0:spTree>
+      <ns0:nvGrpSpPr>
+        <ns0:cNvPr id="1" name=""/>
+        <ns0:cNvGrpSpPr/>
+        <ns0:nvPr/>
+      </ns0:nvGrpSpPr>
+      <ns0:grpSpPr>
+        <ns1:xfrm>
+          <ns1:off x="0" y="0"/>
+          <ns1:ext cx="0" cy="0"/>
+          <ns1:chOff x="0" y="0"/>
+          <ns1:chExt cx="0" cy="0"/>
+        </ns1:xfrm>
+      </ns0:grpSpPr>
+      <ns0:sp>
+        <ns0:nvSpPr>
+          <ns0:cNvPr id="131" name="Shape 131"/>
+          <ns0:cNvSpPr/>
+          <ns0:nvPr>
+            <ns0:ph type="sldImg"/>
+          </ns0:nvPr>
+        </ns0:nvSpPr>
+        <ns0:spPr>
+          <ns1:prstGeom prst="rect">
+            <ns1:avLst/>
+          </ns1:prstGeom>
+        </ns0:spPr>
+        <ns0:txBody>
+          <ns1:bodyPr/>
+          <ns1:lstStyle/>
+          <ns1:p>
+            <ns1:pPr/>
+          </ns1:p>
+        </ns0:txBody>
+      </ns0:sp>
+      <ns0:sp>
+        <ns0:nvSpPr>
+          <ns0:cNvPr id="132" name="Shape 132"/>
+          <ns0:cNvSpPr/>
+          <ns0:nvPr>
+            <ns0:ph type="body" sz="quarter" idx="1"/>
+          </ns0:nvPr>
+        </ns0:nvSpPr>
+        <ns0:spPr>
+          <ns1:prstGeom prst="rect">
+            <ns1:avLst/>
+          </ns1:prstGeom>
+        </ns0:spPr>
+        <ns0:txBody>
+          <ns1:bodyPr/>
+          <ns1:lstStyle/>
+          <ns1:p>
+            <ns1:pPr/>
+            <ns1:r>
+              <ns1:t/>
+            </ns1:r>
+          </ns1:p>
+          <ns1:p>
+            <ns1:pPr/>
+          </ns1:p>
+          <ns1:p>
+            <ns1:pPr/>
+            <ns1:r>
+              <ns1:t/>
+            </ns1:r>
+          </ns1:p>
+          <ns1:p>
+            <ns1:pPr/>
+          </ns1:p>
+          <ns1:p>
+            <ns1:pPr/>
+            <ns1:r>
+              <ns1:t/>
+            </ns1:r>
+          </ns1:p>
+          <ns1:p>
+            <ns1:pPr/>
+          </ns1:p>
+          <ns1:p>
+            <ns1:pPr/>
+            <ns1:r>
+              <ns1:t/>
+            </ns1:r>
+          </ns1:p>
+          <ns1:p>
+            <ns1:pPr/>
+          </ns1:p>
+          <ns1:p>
+            <ns1:pPr/>
+            <ns1:r>
+              <ns1:t/>
+            </ns1:r>
+          </ns1:p>
+          <ns1:p>
+            <ns1:pPr/>
+          </ns1:p>
+          <ns1:p>
+            <ns1:pPr/>
+            <ns1:r>
+              <ns1:t/>
+            </ns1:r>
+          </ns1:p>
+          <ns1:p>
+            <ns1:pPr/>
+            <ns1:r>
+              <ns1:t/>
+            </ns1:r>
+          </ns1:p>
+          <ns1:p>
+            <ns1:pPr/>
+            <ns1:r>
+              <ns1:t/>
+            </ns1:r>
+          </ns1:p>
+          <ns1:p>
+            <ns1:pPr/>
+            <ns1:r>
+              <ns1:t/>
+            </ns1:r>
+          </ns1:p>
+          <ns1:p>
+            <ns1:pPr/>
+            <ns1:r>
+              <ns1:t/>
+            </ns1:r>
+          </ns1:p>
+          <ns1:p>
+            <ns1:pPr/>
+            <ns1:r>
+              <ns1:t/>
+            </ns1:r>
+          </ns1:p>
+          <ns1:p>
+            <ns1:pPr/>
+            <ns1:r>
+              <ns1:t/>
+            </ns1:r>
+          </ns1:p>
+          <ns1:p>
+            <ns1:pPr/>
+            <ns1:r>
+              <ns1:t/>
+            </ns1:r>
+          </ns1:p>
+          <ns1:p>
+            <ns1:pPr/>
+            <ns1:r>
+              <ns1:t/>
+            </ns1:r>
+          </ns1:p>
+          <ns1:p>
+            <ns1:pPr/>
+            <ns1:r>
+              <ns1:t/>
+            </ns1:r>
+          </ns1:p>
+        </ns0:txBody>
+      </ns0:sp>
+    </ns0:spTree>
+  </ns0:cSld>
+  <ns0:clrMapOvr>
+    <ns1:masterClrMapping/>
+  </ns0:clrMapOvr>
+</ns0:notes>
 </file>
 
 <file path=ppt/notesSlides/notesSlide7.xml><?xml version="1.0" encoding="utf-8"?>
-<p:notes xmlns:a="http://schemas.openxmlformats.org/drawingml/2006/main" xmlns:r="http://schemas.openxmlformats.org/officeDocument/2006/relationships" xmlns:p="http://schemas.openxmlformats.org/presentationml/2006/main" xmlns:m="http://schemas.openxmlformats.org/officeDocument/2006/math" xmlns:a14="http://schemas.microsoft.com/office/drawing/2010/main" showMasterSp="1" showMasterPhAnim="1">
-  <p:cSld>
-    <p:spTree>
-      <p:nvGrpSpPr>
-        <p:cNvPr id="1" name=""/>
-        <p:cNvGrpSpPr/>
-        <p:nvPr/>
-      </p:nvGrpSpPr>
-      <p:grpSpPr>
-        <a:xfrm>
-          <a:off x="0" y="0"/>
-          <a:ext cx="0" cy="0"/>
-          <a:chOff x="0" y="0"/>
-          <a:chExt cx="0" cy="0"/>
-        </a:xfrm>
-      </p:grpSpPr>
-      <p:sp>
-        <p:nvSpPr>
-          <p:cNvPr id="143" name="Shape 143"/>
-          <p:cNvSpPr/>
-          <p:nvPr>
-            <p:ph type="sldImg"/>
-          </p:nvPr>
-        </p:nvSpPr>
-        <p:spPr>
-          <a:prstGeom prst="rect">
-            <a:avLst/>
-          </a:prstGeom>
-        </p:spPr>
-        <p:txBody>
-          <a:bodyPr/>
-          <a:lstStyle/>
-          <a:p>
-            <a:pPr/>
-          </a:p>
-        </p:txBody>
-      </p:sp>
-      <p:sp>
-        <p:nvSpPr>
-          <p:cNvPr id="144" name="Shape 144"/>
-          <p:cNvSpPr/>
-          <p:nvPr>
-            <p:ph type="body" sz="quarter" idx="1"/>
-          </p:nvPr>
-        </p:nvSpPr>
-        <p:spPr>
-          <a:prstGeom prst="rect">
-            <a:avLst/>
-          </a:prstGeom>
-        </p:spPr>
-        <p:txBody>
-          <a:bodyPr/>
-          <a:lstStyle/>
-          <a:p>
-            <a:pPr/>
-            <a:r>
-              <a:t>[목표 50초]</a:t>
-            </a:r>
-          </a:p>
-          <a:p>
-            <a:pPr/>
-          </a:p>
-          <a:p>
-            <a:pPr/>
-            <a:r>
-              <a:t>추천은 두 가지 방향으로 나눴습니다. 하나는 현지 탐색입니다. 제가 특히 해보고 싶었던 기능은 현지어 원문 리뷰가 충분하고 한국어 리뷰가 적게 관측된 곳을 찾아보는 것이었습니다. 직접 외국어 리뷰를 하나씩 살펴보는 수고를 덜고 싶었습니다.</a:t>
-            </a:r>
-          </a:p>
-          <a:p>
-            <a:pPr/>
-          </a:p>
-          <a:p>
-            <a:pPr/>
-            <a:r>
-              <a:t>다른 하나는 유명한 곳입니다. 여행지에 가면 꼭 가보고 싶은 대표 명소나 잘 알려진 식당도 있으니까요. 이쪽은 공식 소개 자료나 같은 플랫폼의 평가 규모처럼 유명함을 설명할 수 있는 근거를 따로 봅니다.</a:t>
-            </a:r>
-          </a:p>
-          <a:p>
-            <a:pPr/>
-          </a:p>
-          <a:p>
-            <a:pPr/>
-            <a:r>
-              <a:t>현지어로 리뷰를 썼다고 현지 주민이라고 단정할 수는 없습니다. 그래서 관측한 리뷰의 언어 구성으로 설명하고, 언어를 모르는 리뷰도 함께 계산하도록 했습니다. 엄격한 현지어 추천은 실제 데이터 이용 범위와 언어 품질 검증을 마친 뒤 켤 계획입니다. 지금은 꺼 둔 상태입니다.</a:t>
-            </a:r>
-          </a:p>
-          <a:p>
-            <a:pPr/>
-          </a:p>
-          <a:p>
-            <a:pPr/>
-            <a:r>
-              <a:t>화면 안내: 현지 탐색과 유명한 곳을 비교한 뒤 하단의 개발 상태를 설명합니다.</a:t>
-            </a:r>
-          </a:p>
-          <a:p>
-            <a:pPr/>
-          </a:p>
-          <a:p>
-            <a:pPr/>
-            <a:r>
-              <a:t>[참고 자료 / 낭독하지 않음]</a:t>
-            </a:r>
-          </a:p>
-          <a:p>
-            <a:pPr/>
-            <a:r>
-              <a:t>구현: https://github.com/Jin-s-work/Travel-Agent</a:t>
-            </a:r>
-          </a:p>
-          <a:p>
-            <a:pPr/>
-            <a:r>
-              <a:t>메일·화면: docs/presentation/CREDITS.md (2026-10-07 합성 여행 화면)</a:t>
-            </a:r>
-          </a:p>
-          <a:p>
-            <a:pPr/>
-            <a:r>
-              <a:t>추천 모델: docs/service-v4/RECOMMENDATION_MODEL.md</a:t>
-            </a:r>
-          </a:p>
-          <a:p>
-            <a:pPr/>
-            <a:r>
-              <a:t>일정: docs/service-v2/ITINERARY_RUNBOOK.md</a:t>
-            </a:r>
-          </a:p>
-          <a:p>
-            <a:pPr/>
-            <a:r>
-              <a:t>배포 구성: docs/operations/RENDER_SUPABASE.md</a:t>
-            </a:r>
-          </a:p>
-          <a:p>
-            <a:pPr/>
-            <a:r>
-              <a:t>엄격 현지어 추천은 실제 이용 범위·언어 품질 검증 전 OFF. 100개 도시 입력은 자료 확보 수준을 뜻하지 않음.</a:t>
-            </a:r>
-          </a:p>
-          <a:p>
-            <a:pPr/>
-            <a:r>
-              <a:t>사진: Javier Lastras, Barra de Casa Lucio, CC BY 2.0 https://commons.wikimedia.org/wiki/File:Barra_de_Casa_Lucio_(4245090907).jpg</a:t>
-            </a:r>
-          </a:p>
-          <a:p>
-            <a:pPr/>
-            <a:r>
-              <a:t>사진: Tamorlan, Gallina en Pepitoria (Ciriaco), CC BY-SA 3.0 https://commons.wikimedia.org/wiki/File:Gallina_en_Pepitoria_(Ciriaco).JPG</a:t>
-            </a:r>
-          </a:p>
-          <a:p>
-            <a:pPr/>
-            <a:r>
-              <a:t>영상은 기존 실제 캡처의 편집본이며 실시간 조작이나 최신 모델 실행의 기록이 아님.</a:t>
-            </a:r>
-          </a:p>
-        </p:txBody>
-      </p:sp>
-    </p:spTree>
-  </p:cSld>
-  <p:clrMapOvr>
-    <a:masterClrMapping/>
-  </p:clrMapOvr>
-</p:notes>
+<ns0:notes xmlns:ns0="http://schemas.openxmlformats.org/presentationml/2006/main" xmlns:ns1="http://schemas.openxmlformats.org/drawingml/2006/main" showMasterSp="1" showMasterPhAnim="1">
+  <ns0:cSld>
+    <ns0:spTree>
+      <ns0:nvGrpSpPr>
+        <ns0:cNvPr id="1" name=""/>
+        <ns0:cNvGrpSpPr/>
+        <ns0:nvPr/>
+      </ns0:nvGrpSpPr>
+      <ns0:grpSpPr>
+        <ns1:xfrm>
+          <ns1:off x="0" y="0"/>
+          <ns1:ext cx="0" cy="0"/>
+          <ns1:chOff x="0" y="0"/>
+          <ns1:chExt cx="0" cy="0"/>
+        </ns1:xfrm>
+      </ns0:grpSpPr>
+      <ns0:sp>
+        <ns0:nvSpPr>
+          <ns0:cNvPr id="143" name="Shape 143"/>
+          <ns0:cNvSpPr/>
+          <ns0:nvPr>
+            <ns0:ph type="sldImg"/>
+          </ns0:nvPr>
+        </ns0:nvSpPr>
+        <ns0:spPr>
+          <ns1:prstGeom prst="rect">
+            <ns1:avLst/>
+          </ns1:prstGeom>
+        </ns0:spPr>
+        <ns0:txBody>
+          <ns1:bodyPr/>
+          <ns1:lstStyle/>
+          <ns1:p>
+            <ns1:pPr/>
+          </ns1:p>
+        </ns0:txBody>
+      </ns0:sp>
+      <ns0:sp>
+        <ns0:nvSpPr>
+          <ns0:cNvPr id="144" name="Shape 144"/>
+          <ns0:cNvSpPr/>
+          <ns0:nvPr>
+            <ns0:ph type="body" sz="quarter" idx="1"/>
+          </ns0:nvPr>
+        </ns0:nvSpPr>
+        <ns0:spPr>
+          <ns1:prstGeom prst="rect">
+            <ns1:avLst/>
+          </ns1:prstGeom>
+        </ns0:spPr>
+        <ns0:txBody>
+          <ns1:bodyPr/>
+          <ns1:lstStyle/>
+          <ns1:p>
+            <ns1:pPr/>
+            <ns1:r>
+              <ns1:t/>
+            </ns1:r>
+          </ns1:p>
+          <ns1:p>
+            <ns1:pPr/>
+          </ns1:p>
+          <ns1:p>
+            <ns1:pPr/>
+            <ns1:r>
+              <ns1:t/>
+            </ns1:r>
+          </ns1:p>
+          <ns1:p>
+            <ns1:pPr/>
+          </ns1:p>
+          <ns1:p>
+            <ns1:pPr/>
+            <ns1:r>
+              <ns1:t/>
+            </ns1:r>
+          </ns1:p>
+          <ns1:p>
+            <ns1:pPr/>
+          </ns1:p>
+          <ns1:p>
+            <ns1:pPr/>
+            <ns1:r>
+              <ns1:t/>
+            </ns1:r>
+          </ns1:p>
+          <ns1:p>
+            <ns1:pPr/>
+          </ns1:p>
+          <ns1:p>
+            <ns1:pPr/>
+            <ns1:r>
+              <ns1:t/>
+            </ns1:r>
+          </ns1:p>
+          <ns1:p>
+            <ns1:pPr/>
+          </ns1:p>
+          <ns1:p>
+            <ns1:pPr/>
+            <ns1:r>
+              <ns1:t/>
+            </ns1:r>
+          </ns1:p>
+          <ns1:p>
+            <ns1:pPr/>
+            <ns1:r>
+              <ns1:t/>
+            </ns1:r>
+          </ns1:p>
+          <ns1:p>
+            <ns1:pPr/>
+            <ns1:r>
+              <ns1:t/>
+            </ns1:r>
+          </ns1:p>
+          <ns1:p>
+            <ns1:pPr/>
+            <ns1:r>
+              <ns1:t/>
+            </ns1:r>
+          </ns1:p>
+          <ns1:p>
+            <ns1:pPr/>
+            <ns1:r>
+              <ns1:t/>
+            </ns1:r>
+          </ns1:p>
+          <ns1:p>
+            <ns1:pPr/>
+            <ns1:r>
+              <ns1:t/>
+            </ns1:r>
+          </ns1:p>
+          <ns1:p>
+            <ns1:pPr/>
+            <ns1:r>
+              <ns1:t/>
+            </ns1:r>
+          </ns1:p>
+          <ns1:p>
+            <ns1:pPr/>
+            <ns1:r>
+              <ns1:t/>
+            </ns1:r>
+          </ns1:p>
+          <ns1:p>
+            <ns1:pPr/>
+            <ns1:r>
+              <ns1:t/>
+            </ns1:r>
+          </ns1:p>
+          <ns1:p>
+            <ns1:pPr/>
+            <ns1:r>
+              <ns1:t/>
+            </ns1:r>
+          </ns1:p>
+        </ns0:txBody>
+      </ns0:sp>
+    </ns0:spTree>
+  </ns0:cSld>
+  <ns0:clrMapOvr>
+    <ns1:masterClrMapping/>
+  </ns0:clrMapOvr>
+</ns0:notes>
 </file>
 
 <file path=ppt/notesSlides/notesSlide8.xml><?xml version="1.0" encoding="utf-8"?>
-<p:notes xmlns:a="http://schemas.openxmlformats.org/drawingml/2006/main" xmlns:r="http://schemas.openxmlformats.org/officeDocument/2006/relationships" xmlns:p="http://schemas.openxmlformats.org/presentationml/2006/main" xmlns:m="http://schemas.openxmlformats.org/officeDocument/2006/math" xmlns:a14="http://schemas.microsoft.com/office/drawing/2010/main" showMasterSp="1" showMasterPhAnim="1">
-  <p:cSld>
-    <p:spTree>
-      <p:nvGrpSpPr>
-        <p:cNvPr id="1" name=""/>
-        <p:cNvGrpSpPr/>
-        <p:nvPr/>
-      </p:nvGrpSpPr>
-      <p:grpSpPr>
-        <a:xfrm>
-          <a:off x="0" y="0"/>
-          <a:ext cx="0" cy="0"/>
-          <a:chOff x="0" y="0"/>
-          <a:chExt cx="0" cy="0"/>
-        </a:xfrm>
-      </p:grpSpPr>
-      <p:sp>
-        <p:nvSpPr>
-          <p:cNvPr id="158" name="Shape 158"/>
-          <p:cNvSpPr/>
-          <p:nvPr>
-            <p:ph type="sldImg"/>
-          </p:nvPr>
-        </p:nvSpPr>
-        <p:spPr>
-          <a:prstGeom prst="rect">
-            <a:avLst/>
-          </a:prstGeom>
-        </p:spPr>
-        <p:txBody>
-          <a:bodyPr/>
-          <a:lstStyle/>
-          <a:p>
-            <a:pPr/>
-          </a:p>
-        </p:txBody>
-      </p:sp>
-      <p:sp>
-        <p:nvSpPr>
-          <p:cNvPr id="159" name="Shape 159"/>
-          <p:cNvSpPr/>
-          <p:nvPr>
-            <p:ph type="body" sz="quarter" idx="1"/>
-          </p:nvPr>
-        </p:nvSpPr>
-        <p:spPr>
-          <a:prstGeom prst="rect">
-            <a:avLst/>
-          </a:prstGeom>
-        </p:spPr>
-        <p:txBody>
-          <a:bodyPr/>
-          <a:lstStyle/>
-          <a:p>
-            <a:pPr/>
-            <a:r>
-              <a:t>[목표 50초]</a:t>
-            </a:r>
-          </a:p>
-          <a:p>
-            <a:pPr/>
-          </a:p>
-          <a:p>
-            <a:pPr/>
-            <a:r>
-              <a:t>고른 장소는 실제로 갈 수 있는 일정으로 이어져야 합니다. 그래서 이미 확정된 예약을 먼저 두고, 남은 시간에 다른 장소를 넣을 수 있는지 계산하게 했습니다.</a:t>
-            </a:r>
-          </a:p>
-          <a:p>
-            <a:pPr/>
-          </a:p>
-          <a:p>
-            <a:pPr/>
-            <a:r>
-              <a:t>점심이 한 시에 끝나고 다음 예약이 세 시라면 빈 시간은 두 시간입니다. 여기에 90분 머무는 장소를 넣고 앞뒤 이동에 각각 30분이 걸리면 총 150분이 필요합니다. 머무는 시간만 보면 들어갈 것 같지만 실제로는 30분이 부족한 겁니다.</a:t>
-            </a:r>
-          </a:p>
-          <a:p>
-            <a:pPr/>
-          </a:p>
-          <a:p>
-            <a:pPr/>
-            <a:r>
-              <a:t>일정을 편집할 때도 바로 원본을 바꾸지 않고 먼저 영향을 미리 보여줍니다. 확인한 뒤 적용하고, 다시 되돌릴 수 있습니다. 이동시간이나 영업시간을 모르면 확인이 필요하다고 남기고, 확정 예약을 임의로 옮겨서 일정을 맞추지 않도록 했습니다.</a:t>
-            </a:r>
-          </a:p>
-          <a:p>
-            <a:pPr/>
-          </a:p>
-          <a:p>
-            <a:pPr/>
-            <a:r>
-              <a:t>화면 안내: 두 시간의 빈칸과 필요한 150분을 비교하고 미리보기 흐름을 설명합니다.</a:t>
-            </a:r>
-          </a:p>
-          <a:p>
-            <a:pPr/>
-          </a:p>
-          <a:p>
-            <a:pPr/>
-            <a:r>
-              <a:t>[참고 자료 / 낭독하지 않음]</a:t>
-            </a:r>
-          </a:p>
-          <a:p>
-            <a:pPr/>
-            <a:r>
-              <a:t>구현: https://github.com/Jin-s-work/Travel-Agent</a:t>
-            </a:r>
-          </a:p>
-          <a:p>
-            <a:pPr/>
-            <a:r>
-              <a:t>메일·화면: docs/presentation/CREDITS.md (2026-10-07 합성 여행 화면)</a:t>
-            </a:r>
-          </a:p>
-          <a:p>
-            <a:pPr/>
-            <a:r>
-              <a:t>추천 모델: docs/service-v4/RECOMMENDATION_MODEL.md</a:t>
-            </a:r>
-          </a:p>
-          <a:p>
-            <a:pPr/>
-            <a:r>
-              <a:t>일정: docs/service-v2/ITINERARY_RUNBOOK.md</a:t>
-            </a:r>
-          </a:p>
-          <a:p>
-            <a:pPr/>
-            <a:r>
-              <a:t>배포 구성: docs/operations/RENDER_SUPABASE.md</a:t>
-            </a:r>
-          </a:p>
-          <a:p>
-            <a:pPr/>
-            <a:r>
-              <a:t>엄격 현지어 추천은 실제 이용 범위·언어 품질 검증 전 OFF. 100개 도시 입력은 자료 확보 수준을 뜻하지 않음.</a:t>
-            </a:r>
-          </a:p>
-          <a:p>
-            <a:pPr/>
-            <a:r>
-              <a:t>사진: Javier Lastras, Barra de Casa Lucio, CC BY 2.0 https://commons.wikimedia.org/wiki/File:Barra_de_Casa_Lucio_(4245090907).jpg</a:t>
-            </a:r>
-          </a:p>
-          <a:p>
-            <a:pPr/>
-            <a:r>
-              <a:t>사진: Tamorlan, Gallina en Pepitoria (Ciriaco), CC BY-SA 3.0 https://commons.wikimedia.org/wiki/File:Gallina_en_Pepitoria_(Ciriaco).JPG</a:t>
-            </a:r>
-          </a:p>
-          <a:p>
-            <a:pPr/>
-            <a:r>
-              <a:t>영상은 기존 실제 캡처의 편집본이며 실시간 조작이나 최신 모델 실행의 기록이 아님.</a:t>
-            </a:r>
-          </a:p>
-        </p:txBody>
-      </p:sp>
-    </p:spTree>
-  </p:cSld>
-  <p:clrMapOvr>
-    <a:masterClrMapping/>
-  </p:clrMapOvr>
-</p:notes>
+<ns0:notes xmlns:ns0="http://schemas.openxmlformats.org/presentationml/2006/main" xmlns:ns1="http://schemas.openxmlformats.org/drawingml/2006/main" showMasterSp="1" showMasterPhAnim="1">
+  <ns0:cSld>
+    <ns0:spTree>
+      <ns0:nvGrpSpPr>
+        <ns0:cNvPr id="1" name=""/>
+        <ns0:cNvGrpSpPr/>
+        <ns0:nvPr/>
+      </ns0:nvGrpSpPr>
+      <ns0:grpSpPr>
+        <ns1:xfrm>
+          <ns1:off x="0" y="0"/>
+          <ns1:ext cx="0" cy="0"/>
+          <ns1:chOff x="0" y="0"/>
+          <ns1:chExt cx="0" cy="0"/>
+        </ns1:xfrm>
+      </ns0:grpSpPr>
+      <ns0:sp>
+        <ns0:nvSpPr>
+          <ns0:cNvPr id="158" name="Shape 158"/>
+          <ns0:cNvSpPr/>
+          <ns0:nvPr>
+            <ns0:ph type="sldImg"/>
+          </ns0:nvPr>
+        </ns0:nvSpPr>
+        <ns0:spPr>
+          <ns1:prstGeom prst="rect">
+            <ns1:avLst/>
+          </ns1:prstGeom>
+        </ns0:spPr>
+        <ns0:txBody>
+          <ns1:bodyPr/>
+          <ns1:lstStyle/>
+          <ns1:p>
+            <ns1:pPr/>
+          </ns1:p>
+        </ns0:txBody>
+      </ns0:sp>
+      <ns0:sp>
+        <ns0:nvSpPr>
+          <ns0:cNvPr id="159" name="Shape 159"/>
+          <ns0:cNvSpPr/>
+          <ns0:nvPr>
+            <ns0:ph type="body" sz="quarter" idx="1"/>
+          </ns0:nvPr>
+        </ns0:nvSpPr>
+        <ns0:spPr>
+          <ns1:prstGeom prst="rect">
+            <ns1:avLst/>
+          </ns1:prstGeom>
+        </ns0:spPr>
+        <ns0:txBody>
+          <ns1:bodyPr/>
+          <ns1:lstStyle/>
+          <ns1:p>
+            <ns1:pPr/>
+            <ns1:r>
+              <ns1:t/>
+            </ns1:r>
+          </ns1:p>
+          <ns1:p>
+            <ns1:pPr/>
+          </ns1:p>
+          <ns1:p>
+            <ns1:pPr/>
+            <ns1:r>
+              <ns1:t/>
+            </ns1:r>
+          </ns1:p>
+          <ns1:p>
+            <ns1:pPr/>
+          </ns1:p>
+          <ns1:p>
+            <ns1:pPr/>
+            <ns1:r>
+              <ns1:t/>
+            </ns1:r>
+          </ns1:p>
+          <ns1:p>
+            <ns1:pPr/>
+          </ns1:p>
+          <ns1:p>
+            <ns1:pPr/>
+            <ns1:r>
+              <ns1:t/>
+            </ns1:r>
+          </ns1:p>
+          <ns1:p>
+            <ns1:pPr/>
+          </ns1:p>
+          <ns1:p>
+            <ns1:pPr/>
+            <ns1:r>
+              <ns1:t/>
+            </ns1:r>
+          </ns1:p>
+          <ns1:p>
+            <ns1:pPr/>
+          </ns1:p>
+          <ns1:p>
+            <ns1:pPr/>
+            <ns1:r>
+              <ns1:t/>
+            </ns1:r>
+          </ns1:p>
+          <ns1:p>
+            <ns1:pPr/>
+            <ns1:r>
+              <ns1:t/>
+            </ns1:r>
+          </ns1:p>
+          <ns1:p>
+            <ns1:pPr/>
+            <ns1:r>
+              <ns1:t/>
+            </ns1:r>
+          </ns1:p>
+          <ns1:p>
+            <ns1:pPr/>
+            <ns1:r>
+              <ns1:t/>
+            </ns1:r>
+          </ns1:p>
+          <ns1:p>
+            <ns1:pPr/>
+            <ns1:r>
+              <ns1:t/>
+            </ns1:r>
+          </ns1:p>
+          <ns1:p>
+            <ns1:pPr/>
+            <ns1:r>
+              <ns1:t/>
+            </ns1:r>
+          </ns1:p>
+          <ns1:p>
+            <ns1:pPr/>
+            <ns1:r>
+              <ns1:t/>
+            </ns1:r>
+          </ns1:p>
+          <ns1:p>
+            <ns1:pPr/>
+            <ns1:r>
+              <ns1:t/>
+            </ns1:r>
+          </ns1:p>
+          <ns1:p>
+            <ns1:pPr/>
+            <ns1:r>
+              <ns1:t/>
+            </ns1:r>
+          </ns1:p>
+          <ns1:p>
+            <ns1:pPr/>
+            <ns1:r>
+              <ns1:t/>
+            </ns1:r>
+          </ns1:p>
+        </ns0:txBody>
+      </ns0:sp>
+    </ns0:spTree>
+  </ns0:cSld>
+  <ns0:clrMapOvr>
+    <ns1:masterClrMapping/>
+  </ns0:clrMapOvr>
+</ns0:notes>
 </file>
 
 <file path=ppt/notesSlides/notesSlide9.xml><?xml version="1.0" encoding="utf-8"?>
-<p:notes xmlns:a="http://schemas.openxmlformats.org/drawingml/2006/main" xmlns:r="http://schemas.openxmlformats.org/officeDocument/2006/relationships" xmlns:p="http://schemas.openxmlformats.org/presentationml/2006/main" xmlns:m="http://schemas.openxmlformats.org/officeDocument/2006/math" xmlns:a14="http://schemas.microsoft.com/office/drawing/2010/main" showMasterSp="1" showMasterPhAnim="1">
-  <p:cSld>
-    <p:spTree>
-      <p:nvGrpSpPr>
-        <p:cNvPr id="1" name=""/>
-        <p:cNvGrpSpPr/>
-        <p:nvPr/>
-      </p:nvGrpSpPr>
-      <p:grpSpPr>
-        <a:xfrm>
-          <a:off x="0" y="0"/>
-          <a:ext cx="0" cy="0"/>
-          <a:chOff x="0" y="0"/>
-          <a:chExt cx="0" cy="0"/>
-        </a:xfrm>
-      </p:grpSpPr>
-      <p:sp>
-        <p:nvSpPr>
-          <p:cNvPr id="172" name="Shape 172"/>
-          <p:cNvSpPr/>
-          <p:nvPr>
-            <p:ph type="sldImg"/>
-          </p:nvPr>
-        </p:nvSpPr>
-        <p:spPr>
-          <a:prstGeom prst="rect">
-            <a:avLst/>
-          </a:prstGeom>
-        </p:spPr>
-        <p:txBody>
-          <a:bodyPr/>
-          <a:lstStyle/>
-          <a:p>
-            <a:pPr/>
-          </a:p>
-        </p:txBody>
-      </p:sp>
-      <p:sp>
-        <p:nvSpPr>
-          <p:cNvPr id="173" name="Shape 173"/>
-          <p:cNvSpPr/>
-          <p:nvPr>
-            <p:ph type="body" sz="quarter" idx="1"/>
-          </p:nvPr>
-        </p:nvSpPr>
-        <p:spPr>
-          <a:prstGeom prst="rect">
-            <a:avLst/>
-          </a:prstGeom>
-        </p:spPr>
-        <p:txBody>
-          <a:bodyPr/>
-          <a:lstStyle/>
-          <a:p>
-            <a:pPr/>
-            <a:r>
-              <a:t>[목표 55초]</a:t>
-            </a:r>
-          </a:p>
-          <a:p>
-            <a:pPr/>
-          </a:p>
-          <a:p>
-            <a:pPr/>
-            <a:r>
-              <a:t>구현은 메일을 읽고 질문에 답하는 작은 기능부터 시작했습니다. 여기에 사용자별 여행 저장을 붙이고, 장소 탐색과 일정 편집을 차례로 연결했습니다.</a:t>
-            </a:r>
-          </a:p>
-          <a:p>
-            <a:pPr/>
-          </a:p>
-          <a:p>
-            <a:pPr/>
-            <a:r>
-              <a:t>화면은 웹으로 만들고 Python의 FastAPI 서버가 요청을 처리합니다. 배포 서버는 Render를 쓰고, 여행 데이터와 비공개 파일은 Supabase에 보관하도록 구성했습니다. 서버가 다시 켜져도 여행을 계속 볼 수 있게 하기 위해서입니다.</a:t>
-            </a:r>
-          </a:p>
-          <a:p>
-            <a:pPr/>
-          </a:p>
-          <a:p>
-            <a:pPr/>
-            <a:r>
-              <a:t>AI에는 메일에서 정보를 읽고 본문을 설명하는 역할을 맡겼습니다. 본문 검색에는 text-embedding-3-small을 사용합니다. 반면 날짜 조회나 일정 충돌처럼 정확한 계산이 필요한 부분은 코드로 처리합니다.</a:t>
-            </a:r>
-          </a:p>
-          <a:p>
-            <a:pPr/>
-          </a:p>
-          <a:p>
-            <a:pPr/>
-            <a:r>
-              <a:t>추천도 모델이 아무 장소나 만들어 답하는 방식은 피했습니다. 확인한 후보 안에서 취향 태그의 유사도와 보정한 평점, 거리를 계산하는 콘텐츠 기반 모델을 만들었습니다. 현재는 사용자 행동을 학습한 모델은 아니고, 실제 추천 만족도는 앞으로 확인할 부분입니다.</a:t>
-            </a:r>
-          </a:p>
-          <a:p>
-            <a:pPr/>
-          </a:p>
-          <a:p>
-            <a:pPr/>
-            <a:r>
-              <a:t>화면 안내: 각 기술 이름보다 맡긴 역할을 중심으로 설명합니다.</a:t>
-            </a:r>
-          </a:p>
-          <a:p>
-            <a:pPr/>
-          </a:p>
-          <a:p>
-            <a:pPr/>
-            <a:r>
-              <a:t>[참고 자료 / 낭독하지 않음]</a:t>
-            </a:r>
-          </a:p>
-          <a:p>
-            <a:pPr/>
-            <a:r>
-              <a:t>구현: https://github.com/Jin-s-work/Travel-Agent</a:t>
-            </a:r>
-          </a:p>
-          <a:p>
-            <a:pPr/>
-            <a:r>
-              <a:t>메일·화면: docs/presentation/CREDITS.md (2026-10-07 합성 여행 화면)</a:t>
-            </a:r>
-          </a:p>
-          <a:p>
-            <a:pPr/>
-            <a:r>
-              <a:t>추천 모델: docs/service-v4/RECOMMENDATION_MODEL.md</a:t>
-            </a:r>
-          </a:p>
-          <a:p>
-            <a:pPr/>
-            <a:r>
-              <a:t>일정: docs/service-v2/ITINERARY_RUNBOOK.md</a:t>
-            </a:r>
-          </a:p>
-          <a:p>
-            <a:pPr/>
-            <a:r>
-              <a:t>배포 구성: docs/operations/RENDER_SUPABASE.md</a:t>
-            </a:r>
-          </a:p>
-          <a:p>
-            <a:pPr/>
-            <a:r>
-              <a:t>엄격 현지어 추천은 실제 이용 범위·언어 품질 검증 전 OFF. 100개 도시 입력은 자료 확보 수준을 뜻하지 않음.</a:t>
-            </a:r>
-          </a:p>
-          <a:p>
-            <a:pPr/>
-            <a:r>
-              <a:t>사진: Javier Lastras, Barra de Casa Lucio, CC BY 2.0 https://commons.wikimedia.org/wiki/File:Barra_de_Casa_Lucio_(4245090907).jpg</a:t>
-            </a:r>
-          </a:p>
-          <a:p>
-            <a:pPr/>
-            <a:r>
-              <a:t>사진: Tamorlan, Gallina en Pepitoria (Ciriaco), CC BY-SA 3.0 https://commons.wikimedia.org/wiki/File:Gallina_en_Pepitoria_(Ciriaco).JPG</a:t>
-            </a:r>
-          </a:p>
-          <a:p>
-            <a:pPr/>
-            <a:r>
-              <a:t>영상은 기존 실제 캡처의 편집본이며 실시간 조작이나 최신 모델 실행의 기록이 아님.</a:t>
-            </a:r>
-          </a:p>
-        </p:txBody>
-      </p:sp>
-    </p:spTree>
-  </p:cSld>
-  <p:clrMapOvr>
-    <a:masterClrMapping/>
-  </p:clrMapOvr>
-</p:notes>
+<ns0:notes xmlns:ns0="http://schemas.openxmlformats.org/presentationml/2006/main" xmlns:ns1="http://schemas.openxmlformats.org/drawingml/2006/main" showMasterSp="1" showMasterPhAnim="1">
+  <ns0:cSld>
+    <ns0:spTree>
+      <ns0:nvGrpSpPr>
+        <ns0:cNvPr id="1" name=""/>
+        <ns0:cNvGrpSpPr/>
+        <ns0:nvPr/>
+      </ns0:nvGrpSpPr>
+      <ns0:grpSpPr>
+        <ns1:xfrm>
+          <ns1:off x="0" y="0"/>
+          <ns1:ext cx="0" cy="0"/>
+          <ns1:chOff x="0" y="0"/>
+          <ns1:chExt cx="0" cy="0"/>
+        </ns1:xfrm>
+      </ns0:grpSpPr>
+      <ns0:sp>
+        <ns0:nvSpPr>
+          <ns0:cNvPr id="172" name="Shape 172"/>
+          <ns0:cNvSpPr/>
+          <ns0:nvPr>
+            <ns0:ph type="sldImg"/>
+          </ns0:nvPr>
+        </ns0:nvSpPr>
+        <ns0:spPr>
+          <ns1:prstGeom prst="rect">
+            <ns1:avLst/>
+          </ns1:prstGeom>
+        </ns0:spPr>
+        <ns0:txBody>
+          <ns1:bodyPr/>
+          <ns1:lstStyle/>
+          <ns1:p>
+            <ns1:pPr/>
+          </ns1:p>
+        </ns0:txBody>
+      </ns0:sp>
+      <ns0:sp>
+        <ns0:nvSpPr>
+          <ns0:cNvPr id="173" name="Shape 173"/>
+          <ns0:cNvSpPr/>
+          <ns0:nvPr>
+            <ns0:ph type="body" sz="quarter" idx="1"/>
+          </ns0:nvPr>
+        </ns0:nvSpPr>
+        <ns0:spPr>
+          <ns1:prstGeom prst="rect">
+            <ns1:avLst/>
+          </ns1:prstGeom>
+        </ns0:spPr>
+        <ns0:txBody>
+          <ns1:bodyPr/>
+          <ns1:lstStyle/>
+          <ns1:p>
+            <ns1:pPr/>
+            <ns1:r>
+              <ns1:t/>
+            </ns1:r>
+          </ns1:p>
+          <ns1:p>
+            <ns1:pPr/>
+          </ns1:p>
+          <ns1:p>
+            <ns1:pPr/>
+            <ns1:r>
+              <ns1:t/>
+            </ns1:r>
+          </ns1:p>
+          <ns1:p>
+            <ns1:pPr/>
+          </ns1:p>
+          <ns1:p>
+            <ns1:pPr/>
+            <ns1:r>
+              <ns1:t/>
+            </ns1:r>
+          </ns1:p>
+          <ns1:p>
+            <ns1:pPr/>
+          </ns1:p>
+          <ns1:p>
+            <ns1:pPr/>
+            <ns1:r>
+              <ns1:t/>
+            </ns1:r>
+          </ns1:p>
+          <ns1:p>
+            <ns1:pPr/>
+          </ns1:p>
+          <ns1:p>
+            <ns1:pPr/>
+            <ns1:r>
+              <ns1:t/>
+            </ns1:r>
+          </ns1:p>
+          <ns1:p>
+            <ns1:pPr/>
+          </ns1:p>
+          <ns1:p>
+            <ns1:pPr/>
+            <ns1:r>
+              <ns1:t/>
+            </ns1:r>
+          </ns1:p>
+          <ns1:p>
+            <ns1:pPr/>
+          </ns1:p>
+          <ns1:p>
+            <ns1:pPr/>
+            <ns1:r>
+              <ns1:t/>
+            </ns1:r>
+          </ns1:p>
+          <ns1:p>
+            <ns1:pPr/>
+            <ns1:r>
+              <ns1:t/>
+            </ns1:r>
+          </ns1:p>
+          <ns1:p>
+            <ns1:pPr/>
+            <ns1:r>
+              <ns1:t/>
+            </ns1:r>
+          </ns1:p>
+          <ns1:p>
+            <ns1:pPr/>
+            <ns1:r>
+              <ns1:t/>
+            </ns1:r>
+          </ns1:p>
+          <ns1:p>
+            <ns1:pPr/>
+            <ns1:r>
+              <ns1:t/>
+            </ns1:r>
+          </ns1:p>
+          <ns1:p>
+            <ns1:pPr/>
+            <ns1:r>
+              <ns1:t/>
+            </ns1:r>
+          </ns1:p>
+          <ns1:p>
+            <ns1:pPr/>
+            <ns1:r>
+              <ns1:t/>
+            </ns1:r>
+          </ns1:p>
+          <ns1:p>
+            <ns1:pPr/>
+            <ns1:r>
+              <ns1:t/>
+            </ns1:r>
+          </ns1:p>
+          <ns1:p>
+            <ns1:pPr/>
+            <ns1:r>
+              <ns1:t/>
+            </ns1:r>
+          </ns1:p>
+          <ns1:p>
+            <ns1:pPr/>
+            <ns1:r>
+              <ns1:t/>
+            </ns1:r>
+          </ns1:p>
+        </ns0:txBody>
+      </ns0:sp>
+    </ns0:spTree>
+  </ns0:cSld>
+  <ns0:clrMapOvr>
+    <ns1:masterClrMapping/>
+  </ns0:clrMapOvr>
+</ns0:notes>
 </file>
 
 <file path=ppt/slideLayouts/slideLayout1.xml><?xml version="1.0" encoding="utf-8"?>
